--- a/works/shiryo/術後の痛みの説明資料_サンプル_ヨアケ.pptx
+++ b/works/shiryo/術後の痛みの説明資料_サンプル_ヨアケ.pptx
@@ -1417,7 +1417,159 @@
         </p:nvSpPr>
         <p:spPr>
           <a:xfrm>
-            <a:off x="731520" y="1051560"/>
+            <a:off x="731520" y="1005840"/>
+            <a:ext cx="7680960" cy="329184"/>
+          </a:xfrm>
+          <a:prstGeom prst="rect">
+            <a:avLst/>
+          </a:prstGeom>
+          <a:noFill/>
+          <a:ln/>
+        </p:spPr>
+        <p:txBody>
+          <a:bodyPr wrap="square" lIns="0" tIns="0" rIns="0" bIns="0" rtlCol="0" anchor="ctr">
+            <a:normAutofit/>
+          </a:bodyPr>
+          <a:lstStyle/>
+          <a:p>
+            <a:pPr indent="0" marL="0">
+              <a:lnSpc>
+                <a:spcPts val="2000"/>
+              </a:lnSpc>
+              <a:buNone/>
+            </a:pPr>
+            <a:r>
+              <a:rPr lang="en-US" sz="1400" dirty="0">
+                <a:solidFill>
+                  <a:srgbClr val="9FC9C3"/>
+                </a:solidFill>
+                <a:latin typeface="Meiryo" pitchFamily="34" charset="0"/>
+                <a:ea typeface="Meiryo" pitchFamily="34" charset="-122"/>
+                <a:cs typeface="Meiryo" pitchFamily="34" charset="-120"/>
+              </a:rPr>
+              <a:t>手術を受ける方と、ご家族へ</a:t>
+            </a:r>
+            <a:endParaRPr lang="en-US" sz="1400" dirty="0"/>
+          </a:p>
+        </p:txBody>
+      </p:sp>
+      <p:sp>
+        <p:nvSpPr>
+          <p:cNvPr id="3" name="Text 1"/>
+          <p:cNvSpPr txBox="1"/>
+          <p:nvPr/>
+        </p:nvSpPr>
+        <p:spPr>
+          <a:xfrm>
+            <a:off x="731520" y="1463040"/>
+            <a:ext cx="7680960" cy="1645920"/>
+          </a:xfrm>
+          <a:prstGeom prst="rect">
+            <a:avLst/>
+          </a:prstGeom>
+          <a:noFill/>
+          <a:ln/>
+        </p:spPr>
+        <p:txBody>
+          <a:bodyPr wrap="square" lIns="0" tIns="0" rIns="0" bIns="0" rtlCol="0" anchor="ctr">
+            <a:normAutofit/>
+          </a:bodyPr>
+          <a:lstStyle/>
+          <a:p>
+            <a:pPr indent="0" marL="0">
+              <a:lnSpc>
+                <a:spcPts val="5800"/>
+              </a:lnSpc>
+              <a:buNone/>
+            </a:pPr>
+            <a:r>
+              <a:rPr lang="en-US" sz="3600" b="1" dirty="0">
+                <a:solidFill>
+                  <a:srgbClr val="FFFFFF"/>
+                </a:solidFill>
+                <a:latin typeface="Meiryo" pitchFamily="34" charset="0"/>
+                <a:ea typeface="Meiryo" pitchFamily="34" charset="-122"/>
+                <a:cs typeface="Meiryo" pitchFamily="34" charset="-120"/>
+              </a:rPr>
+              <a:t>手術のあとの痛みと、</a:t>
+            </a:r>
+            <a:endParaRPr lang="en-US" sz="3600" dirty="0"/>
+          </a:p>
+          <a:p>
+            <a:pPr indent="0" marL="0">
+              <a:lnSpc>
+                <a:spcPts val="5800"/>
+              </a:lnSpc>
+              <a:buNone/>
+            </a:pPr>
+            <a:r>
+              <a:rPr lang="en-US" sz="3600" b="1" dirty="0">
+                <a:solidFill>
+                  <a:srgbClr val="FFFFFF"/>
+                </a:solidFill>
+                <a:latin typeface="Meiryo" pitchFamily="34" charset="0"/>
+                <a:ea typeface="Meiryo" pitchFamily="34" charset="-122"/>
+                <a:cs typeface="Meiryo" pitchFamily="34" charset="-120"/>
+              </a:rPr>
+              <a:t>痛み止めの使い方</a:t>
+            </a:r>
+            <a:endParaRPr lang="en-US" sz="3600" dirty="0"/>
+          </a:p>
+        </p:txBody>
+      </p:sp>
+      <p:sp>
+        <p:nvSpPr>
+          <p:cNvPr id="4" name="Text 2"/>
+          <p:cNvSpPr txBox="1"/>
+          <p:nvPr/>
+        </p:nvSpPr>
+        <p:spPr>
+          <a:xfrm>
+            <a:off x="731520" y="3200400"/>
+            <a:ext cx="7680960" cy="402336"/>
+          </a:xfrm>
+          <a:prstGeom prst="rect">
+            <a:avLst/>
+          </a:prstGeom>
+          <a:noFill/>
+          <a:ln/>
+        </p:spPr>
+        <p:txBody>
+          <a:bodyPr wrap="square" lIns="0" tIns="0" rIns="0" bIns="0" rtlCol="0" anchor="ctr">
+            <a:normAutofit/>
+          </a:bodyPr>
+          <a:lstStyle/>
+          <a:p>
+            <a:pPr indent="0" marL="0">
+              <a:lnSpc>
+                <a:spcPts val="2200"/>
+              </a:lnSpc>
+              <a:buNone/>
+            </a:pPr>
+            <a:r>
+              <a:rPr lang="en-US" sz="1500" dirty="0">
+                <a:solidFill>
+                  <a:srgbClr val="C9E2DE"/>
+                </a:solidFill>
+                <a:latin typeface="Meiryo" pitchFamily="34" charset="0"/>
+                <a:ea typeface="Meiryo" pitchFamily="34" charset="-122"/>
+                <a:cs typeface="Meiryo" pitchFamily="34" charset="-120"/>
+              </a:rPr>
+              <a:t>「どのくらい痛いですか？」に、正直に答えるための1枚</a:t>
+            </a:r>
+            <a:endParaRPr lang="en-US" sz="1500" dirty="0"/>
+          </a:p>
+        </p:txBody>
+      </p:sp>
+      <p:sp>
+        <p:nvSpPr>
+          <p:cNvPr id="5" name="Text 3"/>
+          <p:cNvSpPr txBox="1"/>
+          <p:nvPr/>
+        </p:nvSpPr>
+        <p:spPr>
+          <a:xfrm>
+            <a:off x="731520" y="4206240"/>
             <a:ext cx="7680960" cy="310896"/>
           </a:xfrm>
           <a:prstGeom prst="rect">
@@ -1427,150 +1579,15 @@
           <a:ln/>
         </p:spPr>
         <p:txBody>
-          <a:bodyPr wrap="square" lIns="0" tIns="0" rIns="0" bIns="0" rtlCol="0" anchor="ctr"/>
+          <a:bodyPr wrap="square" lIns="0" tIns="0" rIns="0" bIns="0" rtlCol="0" anchor="ctr">
+            <a:normAutofit/>
+          </a:bodyPr>
           <a:lstStyle/>
           <a:p>
             <a:pPr indent="0" marL="0">
-              <a:buNone/>
-            </a:pPr>
-            <a:r>
-              <a:rPr lang="en-US" sz="1400" dirty="0">
-                <a:solidFill>
-                  <a:srgbClr val="9FC9C3"/>
-                </a:solidFill>
-                <a:latin typeface="Meiryo" pitchFamily="34" charset="0"/>
-                <a:ea typeface="Meiryo" pitchFamily="34" charset="-122"/>
-                <a:cs typeface="Meiryo" pitchFamily="34" charset="-120"/>
-              </a:rPr>
-              <a:t>手術を受ける方と、ご家族へ</a:t>
-            </a:r>
-            <a:endParaRPr lang="en-US" sz="1400" dirty="0"/>
-          </a:p>
-        </p:txBody>
-      </p:sp>
-      <p:sp>
-        <p:nvSpPr>
-          <p:cNvPr id="3" name="Text 1"/>
-          <p:cNvSpPr txBox="1"/>
-          <p:nvPr/>
-        </p:nvSpPr>
-        <p:spPr>
-          <a:xfrm>
-            <a:off x="731520" y="1463040"/>
-            <a:ext cx="7680960" cy="1554480"/>
-          </a:xfrm>
-          <a:prstGeom prst="rect">
-            <a:avLst/>
-          </a:prstGeom>
-          <a:noFill/>
-          <a:ln/>
-        </p:spPr>
-        <p:txBody>
-          <a:bodyPr wrap="square" lIns="0" tIns="0" rIns="0" bIns="0" rtlCol="0" anchor="ctr"/>
-          <a:lstStyle/>
-          <a:p>
-            <a:pPr indent="0" marL="0">
-              <a:lnSpc>
-                <a:spcPct val="125000"/>
-              </a:lnSpc>
-              <a:buNone/>
-            </a:pPr>
-            <a:r>
-              <a:rPr lang="en-US" sz="3800" b="1" dirty="0">
-                <a:solidFill>
-                  <a:srgbClr val="FFFFFF"/>
-                </a:solidFill>
-                <a:latin typeface="Meiryo" pitchFamily="34" charset="0"/>
-                <a:ea typeface="Meiryo" pitchFamily="34" charset="-122"/>
-                <a:cs typeface="Meiryo" pitchFamily="34" charset="-120"/>
-              </a:rPr>
-              <a:t>手術のあとの痛みと、</a:t>
-            </a:r>
-            <a:endParaRPr lang="en-US" sz="3800" dirty="0"/>
-          </a:p>
-          <a:p>
-            <a:pPr indent="0" marL="0">
-              <a:lnSpc>
-                <a:spcPct val="125000"/>
-              </a:lnSpc>
-              <a:buNone/>
-            </a:pPr>
-            <a:r>
-              <a:rPr lang="en-US" sz="3800" b="1" dirty="0">
-                <a:solidFill>
-                  <a:srgbClr val="FFFFFF"/>
-                </a:solidFill>
-                <a:latin typeface="Meiryo" pitchFamily="34" charset="0"/>
-                <a:ea typeface="Meiryo" pitchFamily="34" charset="-122"/>
-                <a:cs typeface="Meiryo" pitchFamily="34" charset="-120"/>
-              </a:rPr>
-              <a:t>痛み止めの使い方</a:t>
-            </a:r>
-            <a:endParaRPr lang="en-US" sz="3800" dirty="0"/>
-          </a:p>
-        </p:txBody>
-      </p:sp>
-      <p:sp>
-        <p:nvSpPr>
-          <p:cNvPr id="4" name="Text 2"/>
-          <p:cNvSpPr txBox="1"/>
-          <p:nvPr/>
-        </p:nvSpPr>
-        <p:spPr>
-          <a:xfrm>
-            <a:off x="731520" y="3154680"/>
-            <a:ext cx="7680960" cy="329184"/>
-          </a:xfrm>
-          <a:prstGeom prst="rect">
-            <a:avLst/>
-          </a:prstGeom>
-          <a:noFill/>
-          <a:ln/>
-        </p:spPr>
-        <p:txBody>
-          <a:bodyPr wrap="square" lIns="0" tIns="0" rIns="0" bIns="0" rtlCol="0" anchor="ctr"/>
-          <a:lstStyle/>
-          <a:p>
-            <a:pPr indent="0" marL="0">
-              <a:buNone/>
-            </a:pPr>
-            <a:r>
-              <a:rPr lang="en-US" sz="1500" dirty="0">
-                <a:solidFill>
-                  <a:srgbClr val="C9E2DE"/>
-                </a:solidFill>
-                <a:latin typeface="Meiryo" pitchFamily="34" charset="0"/>
-                <a:ea typeface="Meiryo" pitchFamily="34" charset="-122"/>
-                <a:cs typeface="Meiryo" pitchFamily="34" charset="-120"/>
-              </a:rPr>
-              <a:t>「どのくらい痛いですか？」に、正直に答えるための1枚</a:t>
-            </a:r>
-            <a:endParaRPr lang="en-US" sz="1500" dirty="0"/>
-          </a:p>
-        </p:txBody>
-      </p:sp>
-      <p:sp>
-        <p:nvSpPr>
-          <p:cNvPr id="5" name="Text 3"/>
-          <p:cNvSpPr txBox="1"/>
-          <p:nvPr/>
-        </p:nvSpPr>
-        <p:spPr>
-          <a:xfrm>
-            <a:off x="731520" y="4224528"/>
-            <a:ext cx="7680960" cy="274320"/>
-          </a:xfrm>
-          <a:prstGeom prst="rect">
-            <a:avLst/>
-          </a:prstGeom>
-          <a:noFill/>
-          <a:ln/>
-        </p:spPr>
-        <p:txBody>
-          <a:bodyPr wrap="square" lIns="0" tIns="0" rIns="0" bIns="0" rtlCol="0" anchor="ctr"/>
-          <a:lstStyle/>
-          <a:p>
-            <a:pPr indent="0" marL="0">
+              <a:lnSpc>
+                <a:spcPts val="1500"/>
+              </a:lnSpc>
               <a:buNone/>
             </a:pPr>
             <a:r>
@@ -1621,20 +1638,25 @@
         </p:nvSpPr>
         <p:spPr>
           <a:xfrm>
-            <a:off x="548640" y="384048"/>
-            <a:ext cx="8046720" cy="640080"/>
-          </a:xfrm>
-          <a:prstGeom prst="rect">
-            <a:avLst/>
-          </a:prstGeom>
-          <a:noFill/>
-          <a:ln/>
-        </p:spPr>
-        <p:txBody>
-          <a:bodyPr wrap="square" lIns="0" tIns="0" rIns="0" bIns="0" rtlCol="0" anchor="ctr"/>
+            <a:off x="548640" y="365760"/>
+            <a:ext cx="8046720" cy="731520"/>
+          </a:xfrm>
+          <a:prstGeom prst="rect">
+            <a:avLst/>
+          </a:prstGeom>
+          <a:noFill/>
+          <a:ln/>
+        </p:spPr>
+        <p:txBody>
+          <a:bodyPr wrap="square" lIns="0" tIns="0" rIns="0" bIns="0" rtlCol="0" anchor="ctr">
+            <a:normAutofit/>
+          </a:bodyPr>
           <a:lstStyle/>
           <a:p>
             <a:pPr indent="0" marL="0">
+              <a:lnSpc>
+                <a:spcPts val="4400"/>
+              </a:lnSpc>
               <a:buNone/>
             </a:pPr>
             <a:r>
@@ -1660,12 +1682,12 @@
         </p:nvSpPr>
         <p:spPr>
           <a:xfrm>
-            <a:off x="548640" y="1481328"/>
-            <a:ext cx="4160520" cy="1371600"/>
+            <a:off x="548640" y="1517904"/>
+            <a:ext cx="4023360" cy="1463040"/>
           </a:xfrm>
           <a:prstGeom prst="roundRect">
             <a:avLst>
-              <a:gd name="adj" fmla="val 8000"/>
+              <a:gd name="adj" fmla="val 7500"/>
             </a:avLst>
           </a:prstGeom>
           <a:solidFill>
@@ -1694,27 +1716,29 @@
         </p:nvSpPr>
         <p:spPr>
           <a:xfrm>
-            <a:off x="868680" y="1700784"/>
-            <a:ext cx="3566160" cy="960120"/>
-          </a:xfrm>
-          <a:prstGeom prst="rect">
-            <a:avLst/>
-          </a:prstGeom>
-          <a:noFill/>
-          <a:ln/>
-        </p:spPr>
-        <p:txBody>
-          <a:bodyPr wrap="square" lIns="0" tIns="0" rIns="0" bIns="0" rtlCol="0" anchor="ctr"/>
+            <a:off x="841248" y="1700784"/>
+            <a:ext cx="3438144" cy="1097280"/>
+          </a:xfrm>
+          <a:prstGeom prst="rect">
+            <a:avLst/>
+          </a:prstGeom>
+          <a:noFill/>
+          <a:ln/>
+        </p:spPr>
+        <p:txBody>
+          <a:bodyPr wrap="square" lIns="0" tIns="0" rIns="0" bIns="0" rtlCol="0" anchor="ctr">
+            <a:normAutofit/>
+          </a:bodyPr>
           <a:lstStyle/>
           <a:p>
             <a:pPr indent="0" marL="0">
               <a:lnSpc>
-                <a:spcPct val="120000"/>
-              </a:lnSpc>
-              <a:buNone/>
-            </a:pPr>
-            <a:r>
-              <a:rPr lang="en-US" sz="2100" b="1" dirty="0">
+                <a:spcPts val="3200"/>
+              </a:lnSpc>
+              <a:buNone/>
+            </a:pPr>
+            <a:r>
+              <a:rPr lang="en-US" sz="2000" b="1" dirty="0">
                 <a:solidFill>
                   <a:srgbClr val="0F766E"/>
                 </a:solidFill>
@@ -1722,58 +1746,131 @@
                 <a:ea typeface="Meiryo" pitchFamily="34" charset="-122"/>
                 <a:cs typeface="Meiryo" pitchFamily="34" charset="-120"/>
               </a:rPr>
-              <a:t>「手術後はどのくらい</a:t>
-            </a:r>
-            <a:endParaRPr lang="en-US" sz="2100" dirty="0"/>
-          </a:p>
+              <a:t>「手術後はどのくらい痛いですか？」</a:t>
+            </a:r>
+            <a:endParaRPr lang="en-US" sz="2000" dirty="0"/>
+          </a:p>
+        </p:txBody>
+      </p:sp>
+      <p:sp>
+        <p:nvSpPr>
+          <p:cNvPr id="5" name="Text 3"/>
+          <p:cNvSpPr txBox="1"/>
+          <p:nvPr/>
+        </p:nvSpPr>
+        <p:spPr>
+          <a:xfrm>
+            <a:off x="4846320" y="1536192"/>
+            <a:ext cx="3749040" cy="274320"/>
+          </a:xfrm>
+          <a:prstGeom prst="rect">
+            <a:avLst/>
+          </a:prstGeom>
+          <a:noFill/>
+          <a:ln/>
+        </p:spPr>
+        <p:txBody>
+          <a:bodyPr wrap="square" lIns="0" tIns="0" rIns="0" bIns="0" rtlCol="0" anchor="ctr">
+            <a:normAutofit/>
+          </a:bodyPr>
+          <a:lstStyle/>
           <a:p>
             <a:pPr indent="0" marL="0">
               <a:lnSpc>
-                <a:spcPct val="120000"/>
-              </a:lnSpc>
-              <a:buNone/>
-            </a:pPr>
-            <a:r>
-              <a:rPr lang="en-US" sz="2100" b="1" dirty="0">
-                <a:solidFill>
-                  <a:srgbClr val="0F766E"/>
-                </a:solidFill>
-                <a:latin typeface="Meiryo" pitchFamily="34" charset="0"/>
-                <a:ea typeface="Meiryo" pitchFamily="34" charset="-122"/>
-                <a:cs typeface="Meiryo" pitchFamily="34" charset="-120"/>
-              </a:rPr>
-              <a:t>痛いですか？」</a:t>
-            </a:r>
-            <a:endParaRPr lang="en-US" sz="2100" dirty="0"/>
-          </a:p>
-        </p:txBody>
-      </p:sp>
-      <p:sp>
-        <p:nvSpPr>
-          <p:cNvPr id="5" name="Text 3"/>
-          <p:cNvSpPr txBox="1"/>
-          <p:nvPr/>
-        </p:nvSpPr>
-        <p:spPr>
-          <a:xfrm>
-            <a:off x="4983480" y="1517904"/>
-            <a:ext cx="3611880" cy="274320"/>
-          </a:xfrm>
-          <a:prstGeom prst="rect">
-            <a:avLst/>
-          </a:prstGeom>
-          <a:noFill/>
-          <a:ln/>
-        </p:spPr>
-        <p:txBody>
-          <a:bodyPr wrap="square" lIns="0" tIns="0" rIns="0" bIns="0" rtlCol="0" anchor="ctr"/>
+                <a:spcPts val="1700"/>
+              </a:lnSpc>
+              <a:buNone/>
+            </a:pPr>
+            <a:r>
+              <a:rPr lang="en-US" sz="1200" b="1" dirty="0">
+                <a:solidFill>
+                  <a:srgbClr val="5D6B66"/>
+                </a:solidFill>
+                <a:latin typeface="Meiryo" pitchFamily="34" charset="0"/>
+                <a:ea typeface="Meiryo" pitchFamily="34" charset="-122"/>
+                <a:cs typeface="Meiryo" pitchFamily="34" charset="-120"/>
+              </a:rPr>
+              <a:t>この資料の答え</a:t>
+            </a:r>
+            <a:endParaRPr lang="en-US" sz="1200" dirty="0"/>
+          </a:p>
+        </p:txBody>
+      </p:sp>
+      <p:sp>
+        <p:nvSpPr>
+          <p:cNvPr id="6" name="Text 4"/>
+          <p:cNvSpPr txBox="1"/>
+          <p:nvPr/>
+        </p:nvSpPr>
+        <p:spPr>
+          <a:xfrm>
+            <a:off x="4846320" y="1828800"/>
+            <a:ext cx="3749040" cy="822960"/>
+          </a:xfrm>
+          <a:prstGeom prst="rect">
+            <a:avLst/>
+          </a:prstGeom>
+          <a:noFill/>
+          <a:ln/>
+        </p:spPr>
+        <p:txBody>
+          <a:bodyPr wrap="square" lIns="0" tIns="0" rIns="0" bIns="0" rtlCol="0" anchor="ctr">
+            <a:normAutofit/>
+          </a:bodyPr>
           <a:lstStyle/>
           <a:p>
             <a:pPr indent="0" marL="0">
-              <a:buNone/>
-            </a:pPr>
-            <a:r>
-              <a:rPr lang="en-US" sz="1200" b="1" dirty="0">
+              <a:lnSpc>
+                <a:spcPts val="2200"/>
+              </a:lnSpc>
+              <a:buNone/>
+            </a:pPr>
+            <a:r>
+              <a:rPr lang="en-US" sz="1500" b="1" dirty="0">
+                <a:solidFill>
+                  <a:srgbClr val="1C2422"/>
+                </a:solidFill>
+                <a:latin typeface="Meiryo" pitchFamily="34" charset="0"/>
+                <a:ea typeface="Meiryo" pitchFamily="34" charset="-122"/>
+                <a:cs typeface="Meiryo" pitchFamily="34" charset="-120"/>
+              </a:rPr>
+              <a:t>正直に言うと、どのくらい痛いかはお伝えできません。</a:t>
+            </a:r>
+            <a:endParaRPr lang="en-US" sz="1500" dirty="0"/>
+          </a:p>
+        </p:txBody>
+      </p:sp>
+      <p:sp>
+        <p:nvSpPr>
+          <p:cNvPr id="7" name="Text 5"/>
+          <p:cNvSpPr txBox="1"/>
+          <p:nvPr/>
+        </p:nvSpPr>
+        <p:spPr>
+          <a:xfrm>
+            <a:off x="4846320" y="2670048"/>
+            <a:ext cx="3749040" cy="731520"/>
+          </a:xfrm>
+          <a:prstGeom prst="rect">
+            <a:avLst/>
+          </a:prstGeom>
+          <a:noFill/>
+          <a:ln/>
+        </p:spPr>
+        <p:txBody>
+          <a:bodyPr wrap="square" lIns="0" tIns="0" rIns="0" bIns="0" rtlCol="0" anchor="ctr">
+            <a:normAutofit/>
+          </a:bodyPr>
+          <a:lstStyle/>
+          <a:p>
+            <a:pPr indent="0" marL="0">
+              <a:lnSpc>
+                <a:spcPts val="1700"/>
+              </a:lnSpc>
+              <a:buNone/>
+            </a:pPr>
+            <a:r>
+              <a:rPr lang="en-US" sz="1200" dirty="0">
                 <a:solidFill>
                   <a:srgbClr val="5D6B66"/>
                 </a:solidFill>
@@ -1781,7 +1878,7 @@
                 <a:ea typeface="Meiryo" pitchFamily="34" charset="-122"/>
                 <a:cs typeface="Meiryo" pitchFamily="34" charset="-120"/>
               </a:rPr>
-              <a:t>この資料の答え</a:t>
+              <a:t>痛みの感じ方は人によって違うためです。同じ手術でも、感じ方は変わります。</a:t>
             </a:r>
             <a:endParaRPr lang="en-US" sz="1200" dirty="0"/>
           </a:p>
@@ -1789,33 +1886,35 @@
       </p:sp>
       <p:sp>
         <p:nvSpPr>
-          <p:cNvPr id="6" name="Text 4"/>
-          <p:cNvSpPr txBox="1"/>
-          <p:nvPr/>
-        </p:nvSpPr>
-        <p:spPr>
-          <a:xfrm>
-            <a:off x="4983480" y="1810512"/>
-            <a:ext cx="3611880" cy="731520"/>
-          </a:xfrm>
-          <a:prstGeom prst="rect">
-            <a:avLst/>
-          </a:prstGeom>
-          <a:noFill/>
-          <a:ln/>
-        </p:spPr>
-        <p:txBody>
-          <a:bodyPr wrap="square" lIns="0" tIns="0" rIns="0" bIns="0" rtlCol="0" anchor="ctr"/>
+          <p:cNvPr id="8" name="Text 6"/>
+          <p:cNvSpPr txBox="1"/>
+          <p:nvPr/>
+        </p:nvSpPr>
+        <p:spPr>
+          <a:xfrm>
+            <a:off x="548640" y="3566160"/>
+            <a:ext cx="8046720" cy="731520"/>
+          </a:xfrm>
+          <a:prstGeom prst="rect">
+            <a:avLst/>
+          </a:prstGeom>
+          <a:noFill/>
+          <a:ln/>
+        </p:spPr>
+        <p:txBody>
+          <a:bodyPr wrap="square" lIns="0" tIns="0" rIns="0" bIns="0" rtlCol="0" anchor="ctr">
+            <a:normAutofit/>
+          </a:bodyPr>
           <a:lstStyle/>
           <a:p>
             <a:pPr indent="0" marL="0">
               <a:lnSpc>
-                <a:spcPct val="115000"/>
-              </a:lnSpc>
-              <a:buNone/>
-            </a:pPr>
-            <a:r>
-              <a:rPr lang="en-US" sz="1500" b="1" dirty="0">
+                <a:spcPts val="2000"/>
+              </a:lnSpc>
+              <a:buNone/>
+            </a:pPr>
+            <a:r>
+              <a:rPr lang="en-US" sz="1400" dirty="0">
                 <a:solidFill>
                   <a:srgbClr val="1C2422"/>
                 </a:solidFill>
@@ -1823,155 +1922,39 @@
                 <a:ea typeface="Meiryo" pitchFamily="34" charset="-122"/>
                 <a:cs typeface="Meiryo" pitchFamily="34" charset="-120"/>
               </a:rPr>
-              <a:t>正直に言うと、どのくらい痛いかは</a:t>
-            </a:r>
-            <a:endParaRPr lang="en-US" sz="1500" dirty="0"/>
-          </a:p>
+              <a:t>だから、この資料では「どのくらい痛いか」ではなく、痛みを抑えて早く動くために何ができるかをお伝えします。</a:t>
+            </a:r>
+            <a:endParaRPr lang="en-US" sz="1400" dirty="0"/>
+          </a:p>
+        </p:txBody>
+      </p:sp>
+      <p:sp>
+        <p:nvSpPr>
+          <p:cNvPr id="9" name="Text 7"/>
+          <p:cNvSpPr txBox="1"/>
+          <p:nvPr/>
+        </p:nvSpPr>
+        <p:spPr>
+          <a:xfrm>
+            <a:off x="548640" y="4663440"/>
+            <a:ext cx="6583680" cy="292608"/>
+          </a:xfrm>
+          <a:prstGeom prst="rect">
+            <a:avLst/>
+          </a:prstGeom>
+          <a:noFill/>
+          <a:ln/>
+        </p:spPr>
+        <p:txBody>
+          <a:bodyPr wrap="square" lIns="0" tIns="0" rIns="0" bIns="0" rtlCol="0" anchor="ctr">
+            <a:normAutofit/>
+          </a:bodyPr>
+          <a:lstStyle/>
           <a:p>
             <a:pPr indent="0" marL="0">
               <a:lnSpc>
-                <a:spcPct val="115000"/>
-              </a:lnSpc>
-              <a:buNone/>
-            </a:pPr>
-            <a:r>
-              <a:rPr lang="en-US" sz="1500" b="1" dirty="0">
-                <a:solidFill>
-                  <a:srgbClr val="1C2422"/>
-                </a:solidFill>
-                <a:latin typeface="Meiryo" pitchFamily="34" charset="0"/>
-                <a:ea typeface="Meiryo" pitchFamily="34" charset="-122"/>
-                <a:cs typeface="Meiryo" pitchFamily="34" charset="-120"/>
-              </a:rPr>
-              <a:t>お伝えできません。</a:t>
-            </a:r>
-            <a:endParaRPr lang="en-US" sz="1500" dirty="0"/>
-          </a:p>
-        </p:txBody>
-      </p:sp>
-      <p:sp>
-        <p:nvSpPr>
-          <p:cNvPr id="7" name="Text 5"/>
-          <p:cNvSpPr txBox="1"/>
-          <p:nvPr/>
-        </p:nvSpPr>
-        <p:spPr>
-          <a:xfrm>
-            <a:off x="4983480" y="2560320"/>
-            <a:ext cx="3611880" cy="640080"/>
-          </a:xfrm>
-          <a:prstGeom prst="rect">
-            <a:avLst/>
-          </a:prstGeom>
-          <a:noFill/>
-          <a:ln/>
-        </p:spPr>
-        <p:txBody>
-          <a:bodyPr wrap="square" lIns="0" tIns="0" rIns="0" bIns="0" rtlCol="0" anchor="ctr"/>
-          <a:lstStyle/>
-          <a:p>
-            <a:pPr indent="0" marL="0">
-              <a:lnSpc>
-                <a:spcPct val="115000"/>
-              </a:lnSpc>
-              <a:buNone/>
-            </a:pPr>
-            <a:r>
-              <a:rPr lang="en-US" sz="1200" dirty="0">
-                <a:solidFill>
-                  <a:srgbClr val="5D6B66"/>
-                </a:solidFill>
-                <a:latin typeface="Meiryo" pitchFamily="34" charset="0"/>
-                <a:ea typeface="Meiryo" pitchFamily="34" charset="-122"/>
-                <a:cs typeface="Meiryo" pitchFamily="34" charset="-120"/>
-              </a:rPr>
-              <a:t>痛みの感じ方は人によって違うためです。</a:t>
-            </a:r>
-            <a:endParaRPr lang="en-US" sz="1200" dirty="0"/>
-          </a:p>
-          <a:p>
-            <a:pPr indent="0" marL="0">
-              <a:lnSpc>
-                <a:spcPct val="115000"/>
-              </a:lnSpc>
-              <a:buNone/>
-            </a:pPr>
-            <a:r>
-              <a:rPr lang="en-US" sz="1200" dirty="0">
-                <a:solidFill>
-                  <a:srgbClr val="5D6B66"/>
-                </a:solidFill>
-                <a:latin typeface="Meiryo" pitchFamily="34" charset="0"/>
-                <a:ea typeface="Meiryo" pitchFamily="34" charset="-122"/>
-                <a:cs typeface="Meiryo" pitchFamily="34" charset="-120"/>
-              </a:rPr>
-              <a:t>同じ手術でも、感じ方は変わります。</a:t>
-            </a:r>
-            <a:endParaRPr lang="en-US" sz="1200" dirty="0"/>
-          </a:p>
-        </p:txBody>
-      </p:sp>
-      <p:sp>
-        <p:nvSpPr>
-          <p:cNvPr id="8" name="Text 6"/>
-          <p:cNvSpPr txBox="1"/>
-          <p:nvPr/>
-        </p:nvSpPr>
-        <p:spPr>
-          <a:xfrm>
-            <a:off x="548640" y="3246120"/>
-            <a:ext cx="8046720" cy="365760"/>
-          </a:xfrm>
-          <a:prstGeom prst="rect">
-            <a:avLst/>
-          </a:prstGeom>
-          <a:noFill/>
-          <a:ln/>
-        </p:spPr>
-        <p:txBody>
-          <a:bodyPr wrap="square" lIns="0" tIns="0" rIns="0" bIns="0" rtlCol="0" anchor="ctr"/>
-          <a:lstStyle/>
-          <a:p>
-            <a:pPr indent="0" marL="0">
-              <a:buNone/>
-            </a:pPr>
-            <a:r>
-              <a:rPr lang="en-US" sz="1400" dirty="0">
-                <a:solidFill>
-                  <a:srgbClr val="1C2422"/>
-                </a:solidFill>
-                <a:latin typeface="Meiryo" pitchFamily="34" charset="0"/>
-                <a:ea typeface="Meiryo" pitchFamily="34" charset="-122"/>
-                <a:cs typeface="Meiryo" pitchFamily="34" charset="-120"/>
-              </a:rPr>
-              <a:t>だから、この資料では「どのくらい痛いか」ではなく、痛みを抑えて早く動くために何ができるかをお伝えします。</a:t>
-            </a:r>
-            <a:endParaRPr lang="en-US" sz="1400" dirty="0"/>
-          </a:p>
-        </p:txBody>
-      </p:sp>
-      <p:sp>
-        <p:nvSpPr>
-          <p:cNvPr id="9" name="Text 7"/>
-          <p:cNvSpPr txBox="1"/>
-          <p:nvPr/>
-        </p:nvSpPr>
-        <p:spPr>
-          <a:xfrm>
-            <a:off x="548640" y="4718304"/>
-            <a:ext cx="5943600" cy="237744"/>
-          </a:xfrm>
-          <a:prstGeom prst="rect">
-            <a:avLst/>
-          </a:prstGeom>
-          <a:noFill/>
-          <a:ln/>
-        </p:spPr>
-        <p:txBody>
-          <a:bodyPr wrap="square" lIns="0" tIns="0" rIns="0" bIns="0" rtlCol="0" anchor="ctr"/>
-          <a:lstStyle/>
-          <a:p>
-            <a:pPr indent="0" marL="0">
+                <a:spcPts val="1400"/>
+              </a:lnSpc>
               <a:buNone/>
             </a:pPr>
             <a:r>
@@ -2022,20 +2005,25 @@
         </p:nvSpPr>
         <p:spPr>
           <a:xfrm>
-            <a:off x="548640" y="384048"/>
-            <a:ext cx="8046720" cy="640080"/>
-          </a:xfrm>
-          <a:prstGeom prst="rect">
-            <a:avLst/>
-          </a:prstGeom>
-          <a:noFill/>
-          <a:ln/>
-        </p:spPr>
-        <p:txBody>
-          <a:bodyPr wrap="square" lIns="0" tIns="0" rIns="0" bIns="0" rtlCol="0" anchor="ctr"/>
+            <a:off x="548640" y="365760"/>
+            <a:ext cx="8046720" cy="731520"/>
+          </a:xfrm>
+          <a:prstGeom prst="rect">
+            <a:avLst/>
+          </a:prstGeom>
+          <a:noFill/>
+          <a:ln/>
+        </p:spPr>
+        <p:txBody>
+          <a:bodyPr wrap="square" lIns="0" tIns="0" rIns="0" bIns="0" rtlCol="0" anchor="ctr">
+            <a:normAutofit/>
+          </a:bodyPr>
           <a:lstStyle/>
           <a:p>
             <a:pPr indent="0" marL="0">
+              <a:lnSpc>
+                <a:spcPts val="4400"/>
+              </a:lnSpc>
               <a:buNone/>
             </a:pPr>
             <a:r>
@@ -2061,20 +2049,25 @@
         </p:nvSpPr>
         <p:spPr>
           <a:xfrm>
-            <a:off x="548640" y="1042416"/>
-            <a:ext cx="8046720" cy="310896"/>
-          </a:xfrm>
-          <a:prstGeom prst="rect">
-            <a:avLst/>
-          </a:prstGeom>
-          <a:noFill/>
-          <a:ln/>
-        </p:spPr>
-        <p:txBody>
-          <a:bodyPr wrap="square" lIns="0" tIns="0" rIns="0" bIns="0" rtlCol="0" anchor="ctr"/>
+            <a:off x="548640" y="1078992"/>
+            <a:ext cx="8046720" cy="329184"/>
+          </a:xfrm>
+          <a:prstGeom prst="rect">
+            <a:avLst/>
+          </a:prstGeom>
+          <a:noFill/>
+          <a:ln/>
+        </p:spPr>
+        <p:txBody>
+          <a:bodyPr wrap="square" lIns="0" tIns="0" rIns="0" bIns="0" rtlCol="0" anchor="ctr">
+            <a:normAutofit/>
+          </a:bodyPr>
           <a:lstStyle/>
           <a:p>
             <a:pPr indent="0" marL="0">
+              <a:lnSpc>
+                <a:spcPts val="1900"/>
+              </a:lnSpc>
               <a:buNone/>
             </a:pPr>
             <a:r>
@@ -2100,12 +2093,12 @@
         </p:nvSpPr>
         <p:spPr>
           <a:xfrm>
-            <a:off x="548640" y="1517904"/>
-            <a:ext cx="2487168" cy="2377440"/>
+            <a:off x="548640" y="1554480"/>
+            <a:ext cx="2487168" cy="2468880"/>
           </a:xfrm>
           <a:prstGeom prst="roundRect">
             <a:avLst>
-              <a:gd name="adj" fmla="val 4615"/>
+              <a:gd name="adj" fmla="val 4444"/>
             </a:avLst>
           </a:prstGeom>
           <a:solidFill>
@@ -2134,7 +2127,7 @@
         </p:nvSpPr>
         <p:spPr>
           <a:xfrm>
-            <a:off x="804672" y="1755648"/>
+            <a:off x="804672" y="1773936"/>
             <a:ext cx="402336" cy="402336"/>
           </a:xfrm>
           <a:prstGeom prst="ellipse">
@@ -2154,7 +2147,7 @@
         </p:nvSpPr>
         <p:spPr>
           <a:xfrm>
-            <a:off x="804672" y="1755648"/>
+            <a:off x="804672" y="1773936"/>
             <a:ext cx="402336" cy="402336"/>
           </a:xfrm>
           <a:prstGeom prst="rect">
@@ -2164,10 +2157,15 @@
           <a:ln/>
         </p:spPr>
         <p:txBody>
-          <a:bodyPr wrap="square" lIns="0" tIns="0" rIns="0" bIns="0" rtlCol="0" anchor="ctr"/>
+          <a:bodyPr wrap="square" lIns="0" tIns="0" rIns="0" bIns="0" rtlCol="0" anchor="ctr">
+            <a:normAutofit/>
+          </a:bodyPr>
           <a:lstStyle/>
           <a:p>
             <a:pPr algn="ctr" indent="0" marL="0">
+              <a:lnSpc>
+                <a:spcPts val="1400"/>
+              </a:lnSpc>
               <a:buNone/>
             </a:pPr>
             <a:r>
@@ -2193,27 +2191,29 @@
         </p:nvSpPr>
         <p:spPr>
           <a:xfrm>
-            <a:off x="804672" y="2286000"/>
-            <a:ext cx="1975104" cy="658368"/>
-          </a:xfrm>
-          <a:prstGeom prst="rect">
-            <a:avLst/>
-          </a:prstGeom>
-          <a:noFill/>
-          <a:ln/>
-        </p:spPr>
-        <p:txBody>
-          <a:bodyPr wrap="square" lIns="0" tIns="0" rIns="0" bIns="0" rtlCol="0" anchor="ctr"/>
+            <a:off x="804672" y="2304288"/>
+            <a:ext cx="1975104" cy="731520"/>
+          </a:xfrm>
+          <a:prstGeom prst="rect">
+            <a:avLst/>
+          </a:prstGeom>
+          <a:noFill/>
+          <a:ln/>
+        </p:spPr>
+        <p:txBody>
+          <a:bodyPr wrap="square" lIns="0" tIns="0" rIns="0" bIns="0" rtlCol="0" anchor="ctr">
+            <a:normAutofit/>
+          </a:bodyPr>
           <a:lstStyle/>
           <a:p>
             <a:pPr indent="0" marL="0">
               <a:lnSpc>
-                <a:spcPct val="115000"/>
-              </a:lnSpc>
-              <a:buNone/>
-            </a:pPr>
-            <a:r>
-              <a:rPr lang="en-US" sz="1500" b="1" dirty="0">
+                <a:spcPts val="2200"/>
+              </a:lnSpc>
+              <a:buNone/>
+            </a:pPr>
+            <a:r>
+              <a:rPr lang="en-US" sz="1450" b="1" dirty="0">
                 <a:solidFill>
                   <a:srgbClr val="0F766E"/>
                 </a:solidFill>
@@ -2221,56 +2221,38 @@
                 <a:ea typeface="Meiryo" pitchFamily="34" charset="-122"/>
                 <a:cs typeface="Meiryo" pitchFamily="34" charset="-120"/>
               </a:rPr>
-              <a:t>我慢しないで</a:t>
-            </a:r>
-            <a:endParaRPr lang="en-US" sz="1500" dirty="0"/>
-          </a:p>
+              <a:t>我慢しないで使ってください</a:t>
+            </a:r>
+            <a:endParaRPr lang="en-US" sz="1450" dirty="0"/>
+          </a:p>
+        </p:txBody>
+      </p:sp>
+      <p:sp>
+        <p:nvSpPr>
+          <p:cNvPr id="8" name="Text 6"/>
+          <p:cNvSpPr txBox="1"/>
+          <p:nvPr/>
+        </p:nvSpPr>
+        <p:spPr>
+          <a:xfrm>
+            <a:off x="804672" y="3072384"/>
+            <a:ext cx="1975104" cy="841248"/>
+          </a:xfrm>
+          <a:prstGeom prst="rect">
+            <a:avLst/>
+          </a:prstGeom>
+          <a:noFill/>
+          <a:ln/>
+        </p:spPr>
+        <p:txBody>
+          <a:bodyPr wrap="square" lIns="0" tIns="0" rIns="0" bIns="0" rtlCol="0" anchor="ctr">
+            <a:normAutofit/>
+          </a:bodyPr>
+          <a:lstStyle/>
           <a:p>
             <a:pPr indent="0" marL="0">
               <a:lnSpc>
-                <a:spcPct val="115000"/>
-              </a:lnSpc>
-              <a:buNone/>
-            </a:pPr>
-            <a:r>
-              <a:rPr lang="en-US" sz="1500" b="1" dirty="0">
-                <a:solidFill>
-                  <a:srgbClr val="0F766E"/>
-                </a:solidFill>
-                <a:latin typeface="Meiryo" pitchFamily="34" charset="0"/>
-                <a:ea typeface="Meiryo" pitchFamily="34" charset="-122"/>
-                <a:cs typeface="Meiryo" pitchFamily="34" charset="-120"/>
-              </a:rPr>
-              <a:t>使ってください</a:t>
-            </a:r>
-            <a:endParaRPr lang="en-US" sz="1500" dirty="0"/>
-          </a:p>
-        </p:txBody>
-      </p:sp>
-      <p:sp>
-        <p:nvSpPr>
-          <p:cNvPr id="8" name="Text 6"/>
-          <p:cNvSpPr txBox="1"/>
-          <p:nvPr/>
-        </p:nvSpPr>
-        <p:spPr>
-          <a:xfrm>
-            <a:off x="804672" y="3054096"/>
-            <a:ext cx="1975104" cy="1005840"/>
-          </a:xfrm>
-          <a:prstGeom prst="rect">
-            <a:avLst/>
-          </a:prstGeom>
-          <a:noFill/>
-          <a:ln/>
-        </p:spPr>
-        <p:txBody>
-          <a:bodyPr wrap="square" lIns="0" tIns="0" rIns="0" bIns="0" rtlCol="0" anchor="ctr"/>
-          <a:lstStyle/>
-          <a:p>
-            <a:pPr indent="0" marL="0">
-              <a:lnSpc>
-                <a:spcPct val="125000"/>
+                <a:spcPts val="1700"/>
               </a:lnSpc>
               <a:buNone/>
             </a:pPr>
@@ -2283,47 +2265,7 @@
                 <a:ea typeface="Meiryo" pitchFamily="34" charset="-122"/>
                 <a:cs typeface="Meiryo" pitchFamily="34" charset="-120"/>
               </a:rPr>
-              <a:t>我慢しても、手術の回復が</a:t>
-            </a:r>
-            <a:endParaRPr lang="en-US" sz="1100" dirty="0"/>
-          </a:p>
-          <a:p>
-            <a:pPr indent="0" marL="0">
-              <a:lnSpc>
-                <a:spcPct val="125000"/>
-              </a:lnSpc>
-              <a:buNone/>
-            </a:pPr>
-            <a:r>
-              <a:rPr lang="en-US" sz="1100" dirty="0">
-                <a:solidFill>
-                  <a:srgbClr val="5D6B66"/>
-                </a:solidFill>
-                <a:latin typeface="Meiryo" pitchFamily="34" charset="0"/>
-                <a:ea typeface="Meiryo" pitchFamily="34" charset="-122"/>
-                <a:cs typeface="Meiryo" pitchFamily="34" charset="-120"/>
-              </a:rPr>
-              <a:t>早くなるわけでは</a:t>
-            </a:r>
-            <a:endParaRPr lang="en-US" sz="1100" dirty="0"/>
-          </a:p>
-          <a:p>
-            <a:pPr indent="0" marL="0">
-              <a:lnSpc>
-                <a:spcPct val="125000"/>
-              </a:lnSpc>
-              <a:buNone/>
-            </a:pPr>
-            <a:r>
-              <a:rPr lang="en-US" sz="1100" dirty="0">
-                <a:solidFill>
-                  <a:srgbClr val="5D6B66"/>
-                </a:solidFill>
-                <a:latin typeface="Meiryo" pitchFamily="34" charset="0"/>
-                <a:ea typeface="Meiryo" pitchFamily="34" charset="-122"/>
-                <a:cs typeface="Meiryo" pitchFamily="34" charset="-120"/>
-              </a:rPr>
-              <a:t>ありません。</a:t>
+              <a:t>我慢しても、手術の回復が早くなるわけではありません。</a:t>
             </a:r>
             <a:endParaRPr lang="en-US" sz="1100" dirty="0"/>
           </a:p>
@@ -2337,12 +2279,12 @@
         </p:nvSpPr>
         <p:spPr>
           <a:xfrm>
-            <a:off x="3273552" y="1517904"/>
-            <a:ext cx="2487168" cy="2377440"/>
+            <a:off x="3273552" y="1554480"/>
+            <a:ext cx="2487168" cy="2468880"/>
           </a:xfrm>
           <a:prstGeom prst="roundRect">
             <a:avLst>
-              <a:gd name="adj" fmla="val 4615"/>
+              <a:gd name="adj" fmla="val 4444"/>
             </a:avLst>
           </a:prstGeom>
           <a:solidFill>
@@ -2371,7 +2313,7 @@
         </p:nvSpPr>
         <p:spPr>
           <a:xfrm>
-            <a:off x="3529584" y="1755648"/>
+            <a:off x="3529584" y="1773936"/>
             <a:ext cx="402336" cy="402336"/>
           </a:xfrm>
           <a:prstGeom prst="ellipse">
@@ -2391,7 +2333,7 @@
         </p:nvSpPr>
         <p:spPr>
           <a:xfrm>
-            <a:off x="3529584" y="1755648"/>
+            <a:off x="3529584" y="1773936"/>
             <a:ext cx="402336" cy="402336"/>
           </a:xfrm>
           <a:prstGeom prst="rect">
@@ -2401,10 +2343,15 @@
           <a:ln/>
         </p:spPr>
         <p:txBody>
-          <a:bodyPr wrap="square" lIns="0" tIns="0" rIns="0" bIns="0" rtlCol="0" anchor="ctr"/>
+          <a:bodyPr wrap="square" lIns="0" tIns="0" rIns="0" bIns="0" rtlCol="0" anchor="ctr">
+            <a:normAutofit/>
+          </a:bodyPr>
           <a:lstStyle/>
           <a:p>
             <a:pPr algn="ctr" indent="0" marL="0">
+              <a:lnSpc>
+                <a:spcPts val="1400"/>
+              </a:lnSpc>
               <a:buNone/>
             </a:pPr>
             <a:r>
@@ -2430,27 +2377,29 @@
         </p:nvSpPr>
         <p:spPr>
           <a:xfrm>
-            <a:off x="3529584" y="2286000"/>
-            <a:ext cx="1975104" cy="658368"/>
-          </a:xfrm>
-          <a:prstGeom prst="rect">
-            <a:avLst/>
-          </a:prstGeom>
-          <a:noFill/>
-          <a:ln/>
-        </p:spPr>
-        <p:txBody>
-          <a:bodyPr wrap="square" lIns="0" tIns="0" rIns="0" bIns="0" rtlCol="0" anchor="ctr"/>
+            <a:off x="3529584" y="2304288"/>
+            <a:ext cx="1975104" cy="731520"/>
+          </a:xfrm>
+          <a:prstGeom prst="rect">
+            <a:avLst/>
+          </a:prstGeom>
+          <a:noFill/>
+          <a:ln/>
+        </p:spPr>
+        <p:txBody>
+          <a:bodyPr wrap="square" lIns="0" tIns="0" rIns="0" bIns="0" rtlCol="0" anchor="ctr">
+            <a:normAutofit/>
+          </a:bodyPr>
           <a:lstStyle/>
           <a:p>
             <a:pPr indent="0" marL="0">
               <a:lnSpc>
-                <a:spcPct val="115000"/>
-              </a:lnSpc>
-              <a:buNone/>
-            </a:pPr>
-            <a:r>
-              <a:rPr lang="en-US" sz="1500" b="1" dirty="0">
+                <a:spcPts val="2200"/>
+              </a:lnSpc>
+              <a:buNone/>
+            </a:pPr>
+            <a:r>
+              <a:rPr lang="en-US" sz="1450" b="1" dirty="0">
                 <a:solidFill>
                   <a:srgbClr val="0F766E"/>
                 </a:solidFill>
@@ -2458,56 +2407,38 @@
                 <a:ea typeface="Meiryo" pitchFamily="34" charset="-122"/>
                 <a:cs typeface="Meiryo" pitchFamily="34" charset="-120"/>
               </a:rPr>
-              <a:t>痛くなりそうなとき</a:t>
-            </a:r>
-            <a:endParaRPr lang="en-US" sz="1500" dirty="0"/>
-          </a:p>
+              <a:t>痛くなりそうなときに使えます</a:t>
+            </a:r>
+            <a:endParaRPr lang="en-US" sz="1450" dirty="0"/>
+          </a:p>
+        </p:txBody>
+      </p:sp>
+      <p:sp>
+        <p:nvSpPr>
+          <p:cNvPr id="13" name="Text 11"/>
+          <p:cNvSpPr txBox="1"/>
+          <p:nvPr/>
+        </p:nvSpPr>
+        <p:spPr>
+          <a:xfrm>
+            <a:off x="3529584" y="3072384"/>
+            <a:ext cx="1975104" cy="841248"/>
+          </a:xfrm>
+          <a:prstGeom prst="rect">
+            <a:avLst/>
+          </a:prstGeom>
+          <a:noFill/>
+          <a:ln/>
+        </p:spPr>
+        <p:txBody>
+          <a:bodyPr wrap="square" lIns="0" tIns="0" rIns="0" bIns="0" rtlCol="0" anchor="ctr">
+            <a:normAutofit/>
+          </a:bodyPr>
+          <a:lstStyle/>
           <a:p>
             <a:pPr indent="0" marL="0">
               <a:lnSpc>
-                <a:spcPct val="115000"/>
-              </a:lnSpc>
-              <a:buNone/>
-            </a:pPr>
-            <a:r>
-              <a:rPr lang="en-US" sz="1500" b="1" dirty="0">
-                <a:solidFill>
-                  <a:srgbClr val="0F766E"/>
-                </a:solidFill>
-                <a:latin typeface="Meiryo" pitchFamily="34" charset="0"/>
-                <a:ea typeface="Meiryo" pitchFamily="34" charset="-122"/>
-                <a:cs typeface="Meiryo" pitchFamily="34" charset="-120"/>
-              </a:rPr>
-              <a:t>に使えます</a:t>
-            </a:r>
-            <a:endParaRPr lang="en-US" sz="1500" dirty="0"/>
-          </a:p>
-        </p:txBody>
-      </p:sp>
-      <p:sp>
-        <p:nvSpPr>
-          <p:cNvPr id="13" name="Text 11"/>
-          <p:cNvSpPr txBox="1"/>
-          <p:nvPr/>
-        </p:nvSpPr>
-        <p:spPr>
-          <a:xfrm>
-            <a:off x="3529584" y="3054096"/>
-            <a:ext cx="1975104" cy="1005840"/>
-          </a:xfrm>
-          <a:prstGeom prst="rect">
-            <a:avLst/>
-          </a:prstGeom>
-          <a:noFill/>
-          <a:ln/>
-        </p:spPr>
-        <p:txBody>
-          <a:bodyPr wrap="square" lIns="0" tIns="0" rIns="0" bIns="0" rtlCol="0" anchor="ctr"/>
-          <a:lstStyle/>
-          <a:p>
-            <a:pPr indent="0" marL="0">
-              <a:lnSpc>
-                <a:spcPct val="125000"/>
+                <a:spcPts val="1700"/>
               </a:lnSpc>
               <a:buNone/>
             </a:pPr>
@@ -2520,27 +2451,7 @@
                 <a:ea typeface="Meiryo" pitchFamily="34" charset="-122"/>
                 <a:cs typeface="Meiryo" pitchFamily="34" charset="-120"/>
               </a:rPr>
-              <a:t>痛みが強くなりきってから</a:t>
-            </a:r>
-            <a:endParaRPr lang="en-US" sz="1100" dirty="0"/>
-          </a:p>
-          <a:p>
-            <a:pPr indent="0" marL="0">
-              <a:lnSpc>
-                <a:spcPct val="125000"/>
-              </a:lnSpc>
-              <a:buNone/>
-            </a:pPr>
-            <a:r>
-              <a:rPr lang="en-US" sz="1100" dirty="0">
-                <a:solidFill>
-                  <a:srgbClr val="5D6B66"/>
-                </a:solidFill>
-                <a:latin typeface="Meiryo" pitchFamily="34" charset="0"/>
-                <a:ea typeface="Meiryo" pitchFamily="34" charset="-122"/>
-                <a:cs typeface="Meiryo" pitchFamily="34" charset="-120"/>
-              </a:rPr>
-              <a:t>でなくてかまいません。</a:t>
+              <a:t>痛みが強くなりきってからでなくてかまいません。</a:t>
             </a:r>
             <a:endParaRPr lang="en-US" sz="1100" dirty="0"/>
           </a:p>
@@ -2554,12 +2465,12 @@
         </p:nvSpPr>
         <p:spPr>
           <a:xfrm>
-            <a:off x="5998464" y="1517904"/>
-            <a:ext cx="2487168" cy="2377440"/>
+            <a:off x="5998464" y="1554480"/>
+            <a:ext cx="2487168" cy="2468880"/>
           </a:xfrm>
           <a:prstGeom prst="roundRect">
             <a:avLst>
-              <a:gd name="adj" fmla="val 4615"/>
+              <a:gd name="adj" fmla="val 4444"/>
             </a:avLst>
           </a:prstGeom>
           <a:solidFill>
@@ -2588,7 +2499,7 @@
         </p:nvSpPr>
         <p:spPr>
           <a:xfrm>
-            <a:off x="6254496" y="1755648"/>
+            <a:off x="6254496" y="1773936"/>
             <a:ext cx="402336" cy="402336"/>
           </a:xfrm>
           <a:prstGeom prst="ellipse">
@@ -2608,7 +2519,7 @@
         </p:nvSpPr>
         <p:spPr>
           <a:xfrm>
-            <a:off x="6254496" y="1755648"/>
+            <a:off x="6254496" y="1773936"/>
             <a:ext cx="402336" cy="402336"/>
           </a:xfrm>
           <a:prstGeom prst="rect">
@@ -2618,10 +2529,15 @@
           <a:ln/>
         </p:spPr>
         <p:txBody>
-          <a:bodyPr wrap="square" lIns="0" tIns="0" rIns="0" bIns="0" rtlCol="0" anchor="ctr"/>
+          <a:bodyPr wrap="square" lIns="0" tIns="0" rIns="0" bIns="0" rtlCol="0" anchor="ctr">
+            <a:normAutofit/>
+          </a:bodyPr>
           <a:lstStyle/>
           <a:p>
             <a:pPr algn="ctr" indent="0" marL="0">
+              <a:lnSpc>
+                <a:spcPts val="1400"/>
+              </a:lnSpc>
               <a:buNone/>
             </a:pPr>
             <a:r>
@@ -2647,27 +2563,29 @@
         </p:nvSpPr>
         <p:spPr>
           <a:xfrm>
-            <a:off x="6254496" y="2286000"/>
-            <a:ext cx="1975104" cy="658368"/>
-          </a:xfrm>
-          <a:prstGeom prst="rect">
-            <a:avLst/>
-          </a:prstGeom>
-          <a:noFill/>
-          <a:ln/>
-        </p:spPr>
-        <p:txBody>
-          <a:bodyPr wrap="square" lIns="0" tIns="0" rIns="0" bIns="0" rtlCol="0" anchor="ctr"/>
+            <a:off x="6254496" y="2304288"/>
+            <a:ext cx="1975104" cy="731520"/>
+          </a:xfrm>
+          <a:prstGeom prst="rect">
+            <a:avLst/>
+          </a:prstGeom>
+          <a:noFill/>
+          <a:ln/>
+        </p:spPr>
+        <p:txBody>
+          <a:bodyPr wrap="square" lIns="0" tIns="0" rIns="0" bIns="0" rtlCol="0" anchor="ctr">
+            <a:normAutofit/>
+          </a:bodyPr>
           <a:lstStyle/>
           <a:p>
             <a:pPr indent="0" marL="0">
               <a:lnSpc>
-                <a:spcPct val="115000"/>
-              </a:lnSpc>
-              <a:buNone/>
-            </a:pPr>
-            <a:r>
-              <a:rPr lang="en-US" sz="1500" b="1" dirty="0">
+                <a:spcPts val="2200"/>
+              </a:lnSpc>
+              <a:buNone/>
+            </a:pPr>
+            <a:r>
+              <a:rPr lang="en-US" sz="1450" b="1" dirty="0">
                 <a:solidFill>
                   <a:srgbClr val="0F766E"/>
                 </a:solidFill>
@@ -2675,136 +2593,83 @@
                 <a:ea typeface="Meiryo" pitchFamily="34" charset="-122"/>
                 <a:cs typeface="Meiryo" pitchFamily="34" charset="-120"/>
               </a:rPr>
-              <a:t>動く前に</a:t>
-            </a:r>
-            <a:endParaRPr lang="en-US" sz="1500" dirty="0"/>
-          </a:p>
+              <a:t>動く前に使えます</a:t>
+            </a:r>
+            <a:endParaRPr lang="en-US" sz="1450" dirty="0"/>
+          </a:p>
+        </p:txBody>
+      </p:sp>
+      <p:sp>
+        <p:nvSpPr>
+          <p:cNvPr id="18" name="Text 16"/>
+          <p:cNvSpPr txBox="1"/>
+          <p:nvPr/>
+        </p:nvSpPr>
+        <p:spPr>
+          <a:xfrm>
+            <a:off x="6254496" y="3072384"/>
+            <a:ext cx="1975104" cy="841248"/>
+          </a:xfrm>
+          <a:prstGeom prst="rect">
+            <a:avLst/>
+          </a:prstGeom>
+          <a:noFill/>
+          <a:ln/>
+        </p:spPr>
+        <p:txBody>
+          <a:bodyPr wrap="square" lIns="0" tIns="0" rIns="0" bIns="0" rtlCol="0" anchor="ctr">
+            <a:normAutofit/>
+          </a:bodyPr>
+          <a:lstStyle/>
           <a:p>
             <a:pPr indent="0" marL="0">
               <a:lnSpc>
-                <a:spcPct val="115000"/>
-              </a:lnSpc>
-              <a:buNone/>
-            </a:pPr>
-            <a:r>
-              <a:rPr lang="en-US" sz="1500" b="1" dirty="0">
-                <a:solidFill>
-                  <a:srgbClr val="0F766E"/>
-                </a:solidFill>
-                <a:latin typeface="Meiryo" pitchFamily="34" charset="0"/>
-                <a:ea typeface="Meiryo" pitchFamily="34" charset="-122"/>
-                <a:cs typeface="Meiryo" pitchFamily="34" charset="-120"/>
-              </a:rPr>
-              <a:t>使えます</a:t>
-            </a:r>
-            <a:endParaRPr lang="en-US" sz="1500" dirty="0"/>
-          </a:p>
-        </p:txBody>
-      </p:sp>
-      <p:sp>
-        <p:nvSpPr>
-          <p:cNvPr id="18" name="Text 16"/>
-          <p:cNvSpPr txBox="1"/>
-          <p:nvPr/>
-        </p:nvSpPr>
-        <p:spPr>
-          <a:xfrm>
-            <a:off x="6254496" y="3054096"/>
-            <a:ext cx="1975104" cy="1005840"/>
-          </a:xfrm>
-          <a:prstGeom prst="rect">
-            <a:avLst/>
-          </a:prstGeom>
-          <a:noFill/>
-          <a:ln/>
-        </p:spPr>
-        <p:txBody>
-          <a:bodyPr wrap="square" lIns="0" tIns="0" rIns="0" bIns="0" rtlCol="0" anchor="ctr"/>
+                <a:spcPts val="1700"/>
+              </a:lnSpc>
+              <a:buNone/>
+            </a:pPr>
+            <a:r>
+              <a:rPr lang="en-US" sz="1100" dirty="0">
+                <a:solidFill>
+                  <a:srgbClr val="5D6B66"/>
+                </a:solidFill>
+                <a:latin typeface="Meiryo" pitchFamily="34" charset="0"/>
+                <a:ea typeface="Meiryo" pitchFamily="34" charset="-122"/>
+                <a:cs typeface="Meiryo" pitchFamily="34" charset="-120"/>
+              </a:rPr>
+              <a:t>起き上がる前・歩く前など、動く予定に合わせて使えます。</a:t>
+            </a:r>
+            <a:endParaRPr lang="en-US" sz="1100" dirty="0"/>
+          </a:p>
+        </p:txBody>
+      </p:sp>
+      <p:sp>
+        <p:nvSpPr>
+          <p:cNvPr id="19" name="Text 17"/>
+          <p:cNvSpPr txBox="1"/>
+          <p:nvPr/>
+        </p:nvSpPr>
+        <p:spPr>
+          <a:xfrm>
+            <a:off x="548640" y="4663440"/>
+            <a:ext cx="6583680" cy="292608"/>
+          </a:xfrm>
+          <a:prstGeom prst="rect">
+            <a:avLst/>
+          </a:prstGeom>
+          <a:noFill/>
+          <a:ln/>
+        </p:spPr>
+        <p:txBody>
+          <a:bodyPr wrap="square" lIns="0" tIns="0" rIns="0" bIns="0" rtlCol="0" anchor="ctr">
+            <a:normAutofit/>
+          </a:bodyPr>
           <a:lstStyle/>
           <a:p>
             <a:pPr indent="0" marL="0">
               <a:lnSpc>
-                <a:spcPct val="125000"/>
-              </a:lnSpc>
-              <a:buNone/>
-            </a:pPr>
-            <a:r>
-              <a:rPr lang="en-US" sz="1100" dirty="0">
-                <a:solidFill>
-                  <a:srgbClr val="5D6B66"/>
-                </a:solidFill>
-                <a:latin typeface="Meiryo" pitchFamily="34" charset="0"/>
-                <a:ea typeface="Meiryo" pitchFamily="34" charset="-122"/>
-                <a:cs typeface="Meiryo" pitchFamily="34" charset="-120"/>
-              </a:rPr>
-              <a:t>起き上がる前・歩く前など、</a:t>
-            </a:r>
-            <a:endParaRPr lang="en-US" sz="1100" dirty="0"/>
-          </a:p>
-          <a:p>
-            <a:pPr indent="0" marL="0">
-              <a:lnSpc>
-                <a:spcPct val="125000"/>
-              </a:lnSpc>
-              <a:buNone/>
-            </a:pPr>
-            <a:r>
-              <a:rPr lang="en-US" sz="1100" dirty="0">
-                <a:solidFill>
-                  <a:srgbClr val="5D6B66"/>
-                </a:solidFill>
-                <a:latin typeface="Meiryo" pitchFamily="34" charset="0"/>
-                <a:ea typeface="Meiryo" pitchFamily="34" charset="-122"/>
-                <a:cs typeface="Meiryo" pitchFamily="34" charset="-120"/>
-              </a:rPr>
-              <a:t>動く予定に合わせて</a:t>
-            </a:r>
-            <a:endParaRPr lang="en-US" sz="1100" dirty="0"/>
-          </a:p>
-          <a:p>
-            <a:pPr indent="0" marL="0">
-              <a:lnSpc>
-                <a:spcPct val="125000"/>
-              </a:lnSpc>
-              <a:buNone/>
-            </a:pPr>
-            <a:r>
-              <a:rPr lang="en-US" sz="1100" dirty="0">
-                <a:solidFill>
-                  <a:srgbClr val="5D6B66"/>
-                </a:solidFill>
-                <a:latin typeface="Meiryo" pitchFamily="34" charset="0"/>
-                <a:ea typeface="Meiryo" pitchFamily="34" charset="-122"/>
-                <a:cs typeface="Meiryo" pitchFamily="34" charset="-120"/>
-              </a:rPr>
-              <a:t>使うこともできます。</a:t>
-            </a:r>
-            <a:endParaRPr lang="en-US" sz="1100" dirty="0"/>
-          </a:p>
-        </p:txBody>
-      </p:sp>
-      <p:sp>
-        <p:nvSpPr>
-          <p:cNvPr id="19" name="Text 17"/>
-          <p:cNvSpPr txBox="1"/>
-          <p:nvPr/>
-        </p:nvSpPr>
-        <p:spPr>
-          <a:xfrm>
-            <a:off x="548640" y="4718304"/>
-            <a:ext cx="5943600" cy="237744"/>
-          </a:xfrm>
-          <a:prstGeom prst="rect">
-            <a:avLst/>
-          </a:prstGeom>
-          <a:noFill/>
-          <a:ln/>
-        </p:spPr>
-        <p:txBody>
-          <a:bodyPr wrap="square" lIns="0" tIns="0" rIns="0" bIns="0" rtlCol="0" anchor="ctr"/>
-          <a:lstStyle/>
-          <a:p>
-            <a:pPr indent="0" marL="0">
+                <a:spcPts val="1400"/>
+              </a:lnSpc>
               <a:buNone/>
             </a:pPr>
             <a:r>
@@ -2855,20 +2720,25 @@
         </p:nvSpPr>
         <p:spPr>
           <a:xfrm>
-            <a:off x="548640" y="384048"/>
-            <a:ext cx="8046720" cy="640080"/>
-          </a:xfrm>
-          <a:prstGeom prst="rect">
-            <a:avLst/>
-          </a:prstGeom>
-          <a:noFill/>
-          <a:ln/>
-        </p:spPr>
-        <p:txBody>
-          <a:bodyPr wrap="square" lIns="0" tIns="0" rIns="0" bIns="0" rtlCol="0" anchor="ctr"/>
+            <a:off x="548640" y="365760"/>
+            <a:ext cx="8046720" cy="731520"/>
+          </a:xfrm>
+          <a:prstGeom prst="rect">
+            <a:avLst/>
+          </a:prstGeom>
+          <a:noFill/>
+          <a:ln/>
+        </p:spPr>
+        <p:txBody>
+          <a:bodyPr wrap="square" lIns="0" tIns="0" rIns="0" bIns="0" rtlCol="0" anchor="ctr">
+            <a:normAutofit/>
+          </a:bodyPr>
           <a:lstStyle/>
           <a:p>
             <a:pPr indent="0" marL="0">
+              <a:lnSpc>
+                <a:spcPts val="4400"/>
+              </a:lnSpc>
               <a:buNone/>
             </a:pPr>
             <a:r>
@@ -2894,7 +2764,7 @@
         </p:nvSpPr>
         <p:spPr>
           <a:xfrm>
-            <a:off x="548640" y="1463040"/>
+            <a:off x="548640" y="1517904"/>
             <a:ext cx="3886200" cy="2743200"/>
           </a:xfrm>
           <a:prstGeom prst="roundRect">
@@ -2928,24 +2798,29 @@
         </p:nvSpPr>
         <p:spPr>
           <a:xfrm>
-            <a:off x="822960" y="1664208"/>
-            <a:ext cx="3337560" cy="310896"/>
-          </a:xfrm>
-          <a:prstGeom prst="rect">
-            <a:avLst/>
-          </a:prstGeom>
-          <a:noFill/>
-          <a:ln/>
-        </p:spPr>
-        <p:txBody>
-          <a:bodyPr wrap="square" lIns="0" tIns="0" rIns="0" bIns="0" rtlCol="0" anchor="ctr"/>
+            <a:off x="822960" y="1700784"/>
+            <a:ext cx="3337560" cy="329184"/>
+          </a:xfrm>
+          <a:prstGeom prst="rect">
+            <a:avLst/>
+          </a:prstGeom>
+          <a:noFill/>
+          <a:ln/>
+        </p:spPr>
+        <p:txBody>
+          <a:bodyPr wrap="square" lIns="0" tIns="0" rIns="0" bIns="0" rtlCol="0" anchor="ctr">
+            <a:normAutofit/>
+          </a:bodyPr>
           <a:lstStyle/>
           <a:p>
             <a:pPr indent="0" marL="0">
-              <a:buNone/>
-            </a:pPr>
-            <a:r>
-              <a:rPr lang="en-US" sz="1500" b="1" dirty="0">
+              <a:lnSpc>
+                <a:spcPts val="2100"/>
+              </a:lnSpc>
+              <a:buNone/>
+            </a:pPr>
+            <a:r>
+              <a:rPr lang="en-US" sz="1450" b="1" dirty="0">
                 <a:solidFill>
                   <a:srgbClr val="8A6512"/>
                 </a:solidFill>
@@ -2955,7 +2830,7 @@
               </a:rPr>
               <a:t>痛くなってから使う</a:t>
             </a:r>
-            <a:endParaRPr lang="en-US" sz="1500" dirty="0"/>
+            <a:endParaRPr lang="en-US" sz="1450" dirty="0"/>
           </a:p>
         </p:txBody>
       </p:sp>
@@ -2967,7 +2842,7 @@
         </p:nvSpPr>
         <p:spPr>
           <a:xfrm>
-            <a:off x="822960" y="2121408"/>
+            <a:off x="822960" y="2194560"/>
             <a:ext cx="310896" cy="310896"/>
           </a:xfrm>
           <a:prstGeom prst="ellipse">
@@ -2987,7 +2862,7 @@
         </p:nvSpPr>
         <p:spPr>
           <a:xfrm>
-            <a:off x="822960" y="2121408"/>
+            <a:off x="822960" y="2194560"/>
             <a:ext cx="310896" cy="310896"/>
           </a:xfrm>
           <a:prstGeom prst="rect">
@@ -2997,10 +2872,15 @@
           <a:ln/>
         </p:spPr>
         <p:txBody>
-          <a:bodyPr wrap="square" lIns="0" tIns="0" rIns="0" bIns="0" rtlCol="0" anchor="ctr"/>
+          <a:bodyPr wrap="square" lIns="0" tIns="0" rIns="0" bIns="0" rtlCol="0" anchor="ctr">
+            <a:normAutofit/>
+          </a:bodyPr>
           <a:lstStyle/>
           <a:p>
             <a:pPr algn="ctr" indent="0" marL="0">
+              <a:lnSpc>
+                <a:spcPts val="1400"/>
+              </a:lnSpc>
               <a:buNone/>
             </a:pPr>
             <a:r>
@@ -3026,24 +2906,29 @@
         </p:nvSpPr>
         <p:spPr>
           <a:xfrm>
-            <a:off x="1243584" y="2103120"/>
-            <a:ext cx="2926080" cy="347472"/>
-          </a:xfrm>
-          <a:prstGeom prst="rect">
-            <a:avLst/>
-          </a:prstGeom>
-          <a:noFill/>
-          <a:ln/>
-        </p:spPr>
-        <p:txBody>
-          <a:bodyPr wrap="square" lIns="0" tIns="0" rIns="0" bIns="0" rtlCol="0" anchor="ctr"/>
+            <a:off x="1243584" y="2148840"/>
+            <a:ext cx="2880360" cy="402336"/>
+          </a:xfrm>
+          <a:prstGeom prst="rect">
+            <a:avLst/>
+          </a:prstGeom>
+          <a:noFill/>
+          <a:ln/>
+        </p:spPr>
+        <p:txBody>
+          <a:bodyPr wrap="square" lIns="0" tIns="0" rIns="0" bIns="0" rtlCol="0" anchor="ctr">
+            <a:normAutofit/>
+          </a:bodyPr>
           <a:lstStyle/>
           <a:p>
             <a:pPr indent="0" marL="0">
-              <a:buNone/>
-            </a:pPr>
-            <a:r>
-              <a:rPr lang="en-US" sz="1250" dirty="0">
+              <a:lnSpc>
+                <a:spcPts val="1700"/>
+              </a:lnSpc>
+              <a:buNone/>
+            </a:pPr>
+            <a:r>
+              <a:rPr lang="en-US" sz="1200" dirty="0">
                 <a:solidFill>
                   <a:srgbClr val="1C2422"/>
                 </a:solidFill>
@@ -3053,7 +2938,7 @@
               </a:rPr>
               <a:t>痛みが強くなる</a:t>
             </a:r>
-            <a:endParaRPr lang="en-US" sz="1250" dirty="0"/>
+            <a:endParaRPr lang="en-US" sz="1200" dirty="0"/>
           </a:p>
         </p:txBody>
       </p:sp>
@@ -3065,7 +2950,7 @@
         </p:nvSpPr>
         <p:spPr>
           <a:xfrm>
-            <a:off x="822960" y="2743200"/>
+            <a:off x="822960" y="2816352"/>
             <a:ext cx="310896" cy="310896"/>
           </a:xfrm>
           <a:prstGeom prst="ellipse">
@@ -3085,7 +2970,7 @@
         </p:nvSpPr>
         <p:spPr>
           <a:xfrm>
-            <a:off x="822960" y="2743200"/>
+            <a:off x="822960" y="2816352"/>
             <a:ext cx="310896" cy="310896"/>
           </a:xfrm>
           <a:prstGeom prst="rect">
@@ -3095,10 +2980,15 @@
           <a:ln/>
         </p:spPr>
         <p:txBody>
-          <a:bodyPr wrap="square" lIns="0" tIns="0" rIns="0" bIns="0" rtlCol="0" anchor="ctr"/>
+          <a:bodyPr wrap="square" lIns="0" tIns="0" rIns="0" bIns="0" rtlCol="0" anchor="ctr">
+            <a:normAutofit/>
+          </a:bodyPr>
           <a:lstStyle/>
           <a:p>
             <a:pPr algn="ctr" indent="0" marL="0">
+              <a:lnSpc>
+                <a:spcPts val="1400"/>
+              </a:lnSpc>
               <a:buNone/>
             </a:pPr>
             <a:r>
@@ -3124,24 +3014,29 @@
         </p:nvSpPr>
         <p:spPr>
           <a:xfrm>
-            <a:off x="1243584" y="2724912"/>
-            <a:ext cx="2926080" cy="347472"/>
-          </a:xfrm>
-          <a:prstGeom prst="rect">
-            <a:avLst/>
-          </a:prstGeom>
-          <a:noFill/>
-          <a:ln/>
-        </p:spPr>
-        <p:txBody>
-          <a:bodyPr wrap="square" lIns="0" tIns="0" rIns="0" bIns="0" rtlCol="0" anchor="ctr"/>
+            <a:off x="1243584" y="2770632"/>
+            <a:ext cx="2880360" cy="402336"/>
+          </a:xfrm>
+          <a:prstGeom prst="rect">
+            <a:avLst/>
+          </a:prstGeom>
+          <a:noFill/>
+          <a:ln/>
+        </p:spPr>
+        <p:txBody>
+          <a:bodyPr wrap="square" lIns="0" tIns="0" rIns="0" bIns="0" rtlCol="0" anchor="ctr">
+            <a:normAutofit/>
+          </a:bodyPr>
           <a:lstStyle/>
           <a:p>
             <a:pPr indent="0" marL="0">
-              <a:buNone/>
-            </a:pPr>
-            <a:r>
-              <a:rPr lang="en-US" sz="1250" dirty="0">
+              <a:lnSpc>
+                <a:spcPts val="1700"/>
+              </a:lnSpc>
+              <a:buNone/>
+            </a:pPr>
+            <a:r>
+              <a:rPr lang="en-US" sz="1200" dirty="0">
                 <a:solidFill>
                   <a:srgbClr val="1C2422"/>
                 </a:solidFill>
@@ -3151,7 +3046,7 @@
               </a:rPr>
               <a:t>そこで痛み止めを使う</a:t>
             </a:r>
-            <a:endParaRPr lang="en-US" sz="1250" dirty="0"/>
+            <a:endParaRPr lang="en-US" sz="1200" dirty="0"/>
           </a:p>
         </p:txBody>
       </p:sp>
@@ -3163,7 +3058,7 @@
         </p:nvSpPr>
         <p:spPr>
           <a:xfrm>
-            <a:off x="822960" y="3364992"/>
+            <a:off x="822960" y="3438144"/>
             <a:ext cx="310896" cy="310896"/>
           </a:xfrm>
           <a:prstGeom prst="ellipse">
@@ -3183,7 +3078,7 @@
         </p:nvSpPr>
         <p:spPr>
           <a:xfrm>
-            <a:off x="822960" y="3364992"/>
+            <a:off x="822960" y="3438144"/>
             <a:ext cx="310896" cy="310896"/>
           </a:xfrm>
           <a:prstGeom prst="rect">
@@ -3193,10 +3088,15 @@
           <a:ln/>
         </p:spPr>
         <p:txBody>
-          <a:bodyPr wrap="square" lIns="0" tIns="0" rIns="0" bIns="0" rtlCol="0" anchor="ctr"/>
+          <a:bodyPr wrap="square" lIns="0" tIns="0" rIns="0" bIns="0" rtlCol="0" anchor="ctr">
+            <a:normAutofit/>
+          </a:bodyPr>
           <a:lstStyle/>
           <a:p>
             <a:pPr algn="ctr" indent="0" marL="0">
+              <a:lnSpc>
+                <a:spcPts val="1400"/>
+              </a:lnSpc>
               <a:buNone/>
             </a:pPr>
             <a:r>
@@ -3222,24 +3122,29 @@
         </p:nvSpPr>
         <p:spPr>
           <a:xfrm>
-            <a:off x="1243584" y="3346704"/>
-            <a:ext cx="2926080" cy="347472"/>
-          </a:xfrm>
-          <a:prstGeom prst="rect">
-            <a:avLst/>
-          </a:prstGeom>
-          <a:noFill/>
-          <a:ln/>
-        </p:spPr>
-        <p:txBody>
-          <a:bodyPr wrap="square" lIns="0" tIns="0" rIns="0" bIns="0" rtlCol="0" anchor="ctr"/>
+            <a:off x="1243584" y="3392424"/>
+            <a:ext cx="2880360" cy="402336"/>
+          </a:xfrm>
+          <a:prstGeom prst="rect">
+            <a:avLst/>
+          </a:prstGeom>
+          <a:noFill/>
+          <a:ln/>
+        </p:spPr>
+        <p:txBody>
+          <a:bodyPr wrap="square" lIns="0" tIns="0" rIns="0" bIns="0" rtlCol="0" anchor="ctr">
+            <a:normAutofit/>
+          </a:bodyPr>
           <a:lstStyle/>
           <a:p>
             <a:pPr indent="0" marL="0">
-              <a:buNone/>
-            </a:pPr>
-            <a:r>
-              <a:rPr lang="en-US" sz="1250" dirty="0">
+              <a:lnSpc>
+                <a:spcPts val="1700"/>
+              </a:lnSpc>
+              <a:buNone/>
+            </a:pPr>
+            <a:r>
+              <a:rPr lang="en-US" sz="1200" dirty="0">
                 <a:solidFill>
                   <a:srgbClr val="1C2422"/>
                 </a:solidFill>
@@ -3249,7 +3154,7 @@
               </a:rPr>
               <a:t>効いてくるまでの時間がつらい</a:t>
             </a:r>
-            <a:endParaRPr lang="en-US" sz="1250" dirty="0"/>
+            <a:endParaRPr lang="en-US" sz="1200" dirty="0"/>
           </a:p>
         </p:txBody>
       </p:sp>
@@ -3261,7 +3166,7 @@
         </p:nvSpPr>
         <p:spPr>
           <a:xfrm>
-            <a:off x="4709160" y="1463040"/>
+            <a:off x="4709160" y="1517904"/>
             <a:ext cx="3886200" cy="2743200"/>
           </a:xfrm>
           <a:prstGeom prst="roundRect">
@@ -3295,24 +3200,29 @@
         </p:nvSpPr>
         <p:spPr>
           <a:xfrm>
-            <a:off x="4983480" y="1664208"/>
-            <a:ext cx="3337560" cy="310896"/>
-          </a:xfrm>
-          <a:prstGeom prst="rect">
-            <a:avLst/>
-          </a:prstGeom>
-          <a:noFill/>
-          <a:ln/>
-        </p:spPr>
-        <p:txBody>
-          <a:bodyPr wrap="square" lIns="0" tIns="0" rIns="0" bIns="0" rtlCol="0" anchor="ctr"/>
+            <a:off x="4983480" y="1700784"/>
+            <a:ext cx="3337560" cy="329184"/>
+          </a:xfrm>
+          <a:prstGeom prst="rect">
+            <a:avLst/>
+          </a:prstGeom>
+          <a:noFill/>
+          <a:ln/>
+        </p:spPr>
+        <p:txBody>
+          <a:bodyPr wrap="square" lIns="0" tIns="0" rIns="0" bIns="0" rtlCol="0" anchor="ctr">
+            <a:normAutofit/>
+          </a:bodyPr>
           <a:lstStyle/>
           <a:p>
             <a:pPr indent="0" marL="0">
-              <a:buNone/>
-            </a:pPr>
-            <a:r>
-              <a:rPr lang="en-US" sz="1500" b="1" dirty="0">
+              <a:lnSpc>
+                <a:spcPts val="2100"/>
+              </a:lnSpc>
+              <a:buNone/>
+            </a:pPr>
+            <a:r>
+              <a:rPr lang="en-US" sz="1450" b="1" dirty="0">
                 <a:solidFill>
                   <a:srgbClr val="0F766E"/>
                 </a:solidFill>
@@ -3322,7 +3232,7 @@
               </a:rPr>
               <a:t>痛くなりそうなときに使う</a:t>
             </a:r>
-            <a:endParaRPr lang="en-US" sz="1500" dirty="0"/>
+            <a:endParaRPr lang="en-US" sz="1450" dirty="0"/>
           </a:p>
         </p:txBody>
       </p:sp>
@@ -3334,7 +3244,7 @@
         </p:nvSpPr>
         <p:spPr>
           <a:xfrm>
-            <a:off x="4983480" y="2121408"/>
+            <a:off x="4983480" y="2194560"/>
             <a:ext cx="310896" cy="310896"/>
           </a:xfrm>
           <a:prstGeom prst="ellipse">
@@ -3354,7 +3264,7 @@
         </p:nvSpPr>
         <p:spPr>
           <a:xfrm>
-            <a:off x="4983480" y="2121408"/>
+            <a:off x="4983480" y="2194560"/>
             <a:ext cx="310896" cy="310896"/>
           </a:xfrm>
           <a:prstGeom prst="rect">
@@ -3364,10 +3274,15 @@
           <a:ln/>
         </p:spPr>
         <p:txBody>
-          <a:bodyPr wrap="square" lIns="0" tIns="0" rIns="0" bIns="0" rtlCol="0" anchor="ctr"/>
+          <a:bodyPr wrap="square" lIns="0" tIns="0" rIns="0" bIns="0" rtlCol="0" anchor="ctr">
+            <a:normAutofit/>
+          </a:bodyPr>
           <a:lstStyle/>
           <a:p>
             <a:pPr algn="ctr" indent="0" marL="0">
+              <a:lnSpc>
+                <a:spcPts val="1400"/>
+              </a:lnSpc>
               <a:buNone/>
             </a:pPr>
             <a:r>
@@ -3393,24 +3308,29 @@
         </p:nvSpPr>
         <p:spPr>
           <a:xfrm>
-            <a:off x="5404104" y="2103120"/>
-            <a:ext cx="2926080" cy="347472"/>
-          </a:xfrm>
-          <a:prstGeom prst="rect">
-            <a:avLst/>
-          </a:prstGeom>
-          <a:noFill/>
-          <a:ln/>
-        </p:spPr>
-        <p:txBody>
-          <a:bodyPr wrap="square" lIns="0" tIns="0" rIns="0" bIns="0" rtlCol="0" anchor="ctr"/>
+            <a:off x="5404104" y="2148840"/>
+            <a:ext cx="2880360" cy="402336"/>
+          </a:xfrm>
+          <a:prstGeom prst="rect">
+            <a:avLst/>
+          </a:prstGeom>
+          <a:noFill/>
+          <a:ln/>
+        </p:spPr>
+        <p:txBody>
+          <a:bodyPr wrap="square" lIns="0" tIns="0" rIns="0" bIns="0" rtlCol="0" anchor="ctr">
+            <a:normAutofit/>
+          </a:bodyPr>
           <a:lstStyle/>
           <a:p>
             <a:pPr indent="0" marL="0">
-              <a:buNone/>
-            </a:pPr>
-            <a:r>
-              <a:rPr lang="en-US" sz="1250" dirty="0">
+              <a:lnSpc>
+                <a:spcPts val="1700"/>
+              </a:lnSpc>
+              <a:buNone/>
+            </a:pPr>
+            <a:r>
+              <a:rPr lang="en-US" sz="1200" dirty="0">
                 <a:solidFill>
                   <a:srgbClr val="1C2422"/>
                 </a:solidFill>
@@ -3418,9 +3338,9 @@
                 <a:ea typeface="Meiryo" pitchFamily="34" charset="-122"/>
                 <a:cs typeface="Meiryo" pitchFamily="34" charset="-120"/>
               </a:rPr>
-              <a:t>動く前・痛くなりそうなときに使う</a:t>
-            </a:r>
-            <a:endParaRPr lang="en-US" sz="1250" dirty="0"/>
+              <a:t>動く前に使う</a:t>
+            </a:r>
+            <a:endParaRPr lang="en-US" sz="1200" dirty="0"/>
           </a:p>
         </p:txBody>
       </p:sp>
@@ -3432,7 +3352,7 @@
         </p:nvSpPr>
         <p:spPr>
           <a:xfrm>
-            <a:off x="4983480" y="2743200"/>
+            <a:off x="4983480" y="2816352"/>
             <a:ext cx="310896" cy="310896"/>
           </a:xfrm>
           <a:prstGeom prst="ellipse">
@@ -3452,7 +3372,7 @@
         </p:nvSpPr>
         <p:spPr>
           <a:xfrm>
-            <a:off x="4983480" y="2743200"/>
+            <a:off x="4983480" y="2816352"/>
             <a:ext cx="310896" cy="310896"/>
           </a:xfrm>
           <a:prstGeom prst="rect">
@@ -3462,10 +3382,15 @@
           <a:ln/>
         </p:spPr>
         <p:txBody>
-          <a:bodyPr wrap="square" lIns="0" tIns="0" rIns="0" bIns="0" rtlCol="0" anchor="ctr"/>
+          <a:bodyPr wrap="square" lIns="0" tIns="0" rIns="0" bIns="0" rtlCol="0" anchor="ctr">
+            <a:normAutofit/>
+          </a:bodyPr>
           <a:lstStyle/>
           <a:p>
             <a:pPr algn="ctr" indent="0" marL="0">
+              <a:lnSpc>
+                <a:spcPts val="1400"/>
+              </a:lnSpc>
               <a:buNone/>
             </a:pPr>
             <a:r>
@@ -3491,24 +3416,29 @@
         </p:nvSpPr>
         <p:spPr>
           <a:xfrm>
-            <a:off x="5404104" y="2724912"/>
-            <a:ext cx="2926080" cy="347472"/>
-          </a:xfrm>
-          <a:prstGeom prst="rect">
-            <a:avLst/>
-          </a:prstGeom>
-          <a:noFill/>
-          <a:ln/>
-        </p:spPr>
-        <p:txBody>
-          <a:bodyPr wrap="square" lIns="0" tIns="0" rIns="0" bIns="0" rtlCol="0" anchor="ctr"/>
+            <a:off x="5404104" y="2770632"/>
+            <a:ext cx="2880360" cy="402336"/>
+          </a:xfrm>
+          <a:prstGeom prst="rect">
+            <a:avLst/>
+          </a:prstGeom>
+          <a:noFill/>
+          <a:ln/>
+        </p:spPr>
+        <p:txBody>
+          <a:bodyPr wrap="square" lIns="0" tIns="0" rIns="0" bIns="0" rtlCol="0" anchor="ctr">
+            <a:normAutofit/>
+          </a:bodyPr>
           <a:lstStyle/>
           <a:p>
             <a:pPr indent="0" marL="0">
-              <a:buNone/>
-            </a:pPr>
-            <a:r>
-              <a:rPr lang="en-US" sz="1250" dirty="0">
+              <a:lnSpc>
+                <a:spcPts val="1700"/>
+              </a:lnSpc>
+              <a:buNone/>
+            </a:pPr>
+            <a:r>
+              <a:rPr lang="en-US" sz="1200" dirty="0">
                 <a:solidFill>
                   <a:srgbClr val="1C2422"/>
                 </a:solidFill>
@@ -3518,7 +3448,7 @@
               </a:rPr>
               <a:t>痛みが上がりきらない</a:t>
             </a:r>
-            <a:endParaRPr lang="en-US" sz="1250" dirty="0"/>
+            <a:endParaRPr lang="en-US" sz="1200" dirty="0"/>
           </a:p>
         </p:txBody>
       </p:sp>
@@ -3530,7 +3460,7 @@
         </p:nvSpPr>
         <p:spPr>
           <a:xfrm>
-            <a:off x="4983480" y="3364992"/>
+            <a:off x="4983480" y="3438144"/>
             <a:ext cx="310896" cy="310896"/>
           </a:xfrm>
           <a:prstGeom prst="ellipse">
@@ -3550,7 +3480,7 @@
         </p:nvSpPr>
         <p:spPr>
           <a:xfrm>
-            <a:off x="4983480" y="3364992"/>
+            <a:off x="4983480" y="3438144"/>
             <a:ext cx="310896" cy="310896"/>
           </a:xfrm>
           <a:prstGeom prst="rect">
@@ -3560,10 +3490,15 @@
           <a:ln/>
         </p:spPr>
         <p:txBody>
-          <a:bodyPr wrap="square" lIns="0" tIns="0" rIns="0" bIns="0" rtlCol="0" anchor="ctr"/>
+          <a:bodyPr wrap="square" lIns="0" tIns="0" rIns="0" bIns="0" rtlCol="0" anchor="ctr">
+            <a:normAutofit/>
+          </a:bodyPr>
           <a:lstStyle/>
           <a:p>
             <a:pPr algn="ctr" indent="0" marL="0">
+              <a:lnSpc>
+                <a:spcPts val="1400"/>
+              </a:lnSpc>
               <a:buNone/>
             </a:pPr>
             <a:r>
@@ -3589,24 +3524,29 @@
         </p:nvSpPr>
         <p:spPr>
           <a:xfrm>
-            <a:off x="5404104" y="3346704"/>
-            <a:ext cx="2926080" cy="347472"/>
-          </a:xfrm>
-          <a:prstGeom prst="rect">
-            <a:avLst/>
-          </a:prstGeom>
-          <a:noFill/>
-          <a:ln/>
-        </p:spPr>
-        <p:txBody>
-          <a:bodyPr wrap="square" lIns="0" tIns="0" rIns="0" bIns="0" rtlCol="0" anchor="ctr"/>
+            <a:off x="5404104" y="3392424"/>
+            <a:ext cx="2880360" cy="402336"/>
+          </a:xfrm>
+          <a:prstGeom prst="rect">
+            <a:avLst/>
+          </a:prstGeom>
+          <a:noFill/>
+          <a:ln/>
+        </p:spPr>
+        <p:txBody>
+          <a:bodyPr wrap="square" lIns="0" tIns="0" rIns="0" bIns="0" rtlCol="0" anchor="ctr">
+            <a:normAutofit/>
+          </a:bodyPr>
           <a:lstStyle/>
           <a:p>
             <a:pPr indent="0" marL="0">
-              <a:buNone/>
-            </a:pPr>
-            <a:r>
-              <a:rPr lang="en-US" sz="1250" dirty="0">
+              <a:lnSpc>
+                <a:spcPts val="1700"/>
+              </a:lnSpc>
+              <a:buNone/>
+            </a:pPr>
+            <a:r>
+              <a:rPr lang="en-US" sz="1200" dirty="0">
                 <a:solidFill>
                   <a:srgbClr val="1C2422"/>
                 </a:solidFill>
@@ -3616,7 +3556,7 @@
               </a:rPr>
               <a:t>起き上がる・歩くがしやすい</a:t>
             </a:r>
-            <a:endParaRPr lang="en-US" sz="1250" dirty="0"/>
+            <a:endParaRPr lang="en-US" sz="1200" dirty="0"/>
           </a:p>
         </p:txBody>
       </p:sp>
@@ -3628,20 +3568,25 @@
         </p:nvSpPr>
         <p:spPr>
           <a:xfrm>
-            <a:off x="548640" y="4297680"/>
-            <a:ext cx="8046720" cy="292608"/>
-          </a:xfrm>
-          <a:prstGeom prst="rect">
-            <a:avLst/>
-          </a:prstGeom>
-          <a:noFill/>
-          <a:ln/>
-        </p:spPr>
-        <p:txBody>
-          <a:bodyPr wrap="square" lIns="0" tIns="0" rIns="0" bIns="0" rtlCol="0" anchor="ctr"/>
+            <a:off x="548640" y="4352544"/>
+            <a:ext cx="8046720" cy="329184"/>
+          </a:xfrm>
+          <a:prstGeom prst="rect">
+            <a:avLst/>
+          </a:prstGeom>
+          <a:noFill/>
+          <a:ln/>
+        </p:spPr>
+        <p:txBody>
+          <a:bodyPr wrap="square" lIns="0" tIns="0" rIns="0" bIns="0" rtlCol="0" anchor="ctr">
+            <a:normAutofit/>
+          </a:bodyPr>
           <a:lstStyle/>
           <a:p>
             <a:pPr indent="0" marL="0">
+              <a:lnSpc>
+                <a:spcPts val="1700"/>
+              </a:lnSpc>
               <a:buNone/>
             </a:pPr>
             <a:r>
@@ -3692,20 +3637,25 @@
         </p:nvSpPr>
         <p:spPr>
           <a:xfrm>
-            <a:off x="548640" y="384048"/>
-            <a:ext cx="8046720" cy="640080"/>
-          </a:xfrm>
-          <a:prstGeom prst="rect">
-            <a:avLst/>
-          </a:prstGeom>
-          <a:noFill/>
-          <a:ln/>
-        </p:spPr>
-        <p:txBody>
-          <a:bodyPr wrap="square" lIns="0" tIns="0" rIns="0" bIns="0" rtlCol="0" anchor="ctr"/>
+            <a:off x="548640" y="365760"/>
+            <a:ext cx="8046720" cy="731520"/>
+          </a:xfrm>
+          <a:prstGeom prst="rect">
+            <a:avLst/>
+          </a:prstGeom>
+          <a:noFill/>
+          <a:ln/>
+        </p:spPr>
+        <p:txBody>
+          <a:bodyPr wrap="square" lIns="0" tIns="0" rIns="0" bIns="0" rtlCol="0" anchor="ctr">
+            <a:normAutofit/>
+          </a:bodyPr>
           <a:lstStyle/>
           <a:p>
             <a:pPr indent="0" marL="0">
+              <a:lnSpc>
+                <a:spcPts val="4400"/>
+              </a:lnSpc>
               <a:buNone/>
             </a:pPr>
             <a:r>
@@ -3731,12 +3681,12 @@
         </p:nvSpPr>
         <p:spPr>
           <a:xfrm>
-            <a:off x="548640" y="1371600"/>
-            <a:ext cx="8046720" cy="658368"/>
+            <a:off x="548640" y="1426464"/>
+            <a:ext cx="8046720" cy="841248"/>
           </a:xfrm>
           <a:prstGeom prst="roundRect">
             <a:avLst>
-              <a:gd name="adj" fmla="val 16667"/>
+              <a:gd name="adj" fmla="val 13043"/>
             </a:avLst>
           </a:prstGeom>
           <a:solidFill>
@@ -3758,27 +3708,29 @@
         </p:nvSpPr>
         <p:spPr>
           <a:xfrm>
-            <a:off x="841248" y="1444752"/>
-            <a:ext cx="7498080" cy="530352"/>
-          </a:xfrm>
-          <a:prstGeom prst="rect">
-            <a:avLst/>
-          </a:prstGeom>
-          <a:noFill/>
-          <a:ln/>
-        </p:spPr>
-        <p:txBody>
-          <a:bodyPr wrap="square" lIns="0" tIns="0" rIns="0" bIns="0" rtlCol="0" anchor="ctr"/>
+            <a:off x="841248" y="1517904"/>
+            <a:ext cx="7461504" cy="694944"/>
+          </a:xfrm>
+          <a:prstGeom prst="rect">
+            <a:avLst/>
+          </a:prstGeom>
+          <a:noFill/>
+          <a:ln/>
+        </p:spPr>
+        <p:txBody>
+          <a:bodyPr wrap="square" lIns="0" tIns="0" rIns="0" bIns="0" rtlCol="0" anchor="ctr">
+            <a:normAutofit/>
+          </a:bodyPr>
           <a:lstStyle/>
           <a:p>
             <a:pPr indent="0" marL="0">
               <a:lnSpc>
-                <a:spcPct val="120000"/>
-              </a:lnSpc>
-              <a:buNone/>
-            </a:pPr>
-            <a:r>
-              <a:rPr lang="en-US" sz="1350" b="1" dirty="0">
+                <a:spcPts val="1900"/>
+              </a:lnSpc>
+              <a:buNone/>
+            </a:pPr>
+            <a:r>
+              <a:rPr lang="en-US" sz="1300" b="1" dirty="0">
                 <a:solidFill>
                   <a:srgbClr val="0F766E"/>
                 </a:solidFill>
@@ -3786,29 +3738,9 @@
                 <a:ea typeface="Meiryo" pitchFamily="34" charset="-122"/>
                 <a:cs typeface="Meiryo" pitchFamily="34" charset="-120"/>
               </a:rPr>
-              <a:t>手術のあとは、早めに起きて動くことが何より大事です（早期離床といいます）。</a:t>
-            </a:r>
-            <a:endParaRPr lang="en-US" sz="1350" dirty="0"/>
-          </a:p>
-          <a:p>
-            <a:pPr indent="0" marL="0">
-              <a:lnSpc>
-                <a:spcPct val="120000"/>
-              </a:lnSpc>
-              <a:buNone/>
-            </a:pPr>
-            <a:r>
-              <a:rPr lang="en-US" sz="1350" b="1" dirty="0">
-                <a:solidFill>
-                  <a:srgbClr val="0F766E"/>
-                </a:solidFill>
-                <a:latin typeface="Meiryo" pitchFamily="34" charset="0"/>
-                <a:ea typeface="Meiryo" pitchFamily="34" charset="-122"/>
-                <a:cs typeface="Meiryo" pitchFamily="34" charset="-120"/>
-              </a:rPr>
-              <a:t>動くことで体の回復が進みます。痛み止めは、そのために使う道具でもあります。</a:t>
-            </a:r>
-            <a:endParaRPr lang="en-US" sz="1350" dirty="0"/>
+              <a:t>手術のあとは、早めに起きて動くことが何より大事です（早期離床といいます）。動くことで体の回復が進みます。痛み止めは、そのために使う道具でもあります。</a:t>
+            </a:r>
+            <a:endParaRPr lang="en-US" sz="1300" dirty="0"/>
           </a:p>
         </p:txBody>
       </p:sp>
@@ -3820,8 +3752,8 @@
         </p:nvSpPr>
         <p:spPr>
           <a:xfrm>
-            <a:off x="566928" y="2249424"/>
-            <a:ext cx="457200" cy="457200"/>
+            <a:off x="566928" y="2432304"/>
+            <a:ext cx="420624" cy="420624"/>
           </a:xfrm>
           <a:prstGeom prst="ellipse">
             <a:avLst/>
@@ -3840,32 +3772,81 @@
         </p:nvSpPr>
         <p:spPr>
           <a:xfrm>
-            <a:off x="566928" y="2249424"/>
-            <a:ext cx="457200" cy="457200"/>
-          </a:xfrm>
-          <a:prstGeom prst="rect">
-            <a:avLst/>
-          </a:prstGeom>
-          <a:noFill/>
-          <a:ln/>
-        </p:spPr>
-        <p:txBody>
-          <a:bodyPr wrap="square" lIns="0" tIns="0" rIns="0" bIns="0" rtlCol="0" anchor="ctr"/>
+            <a:off x="566928" y="2432304"/>
+            <a:ext cx="420624" cy="420624"/>
+          </a:xfrm>
+          <a:prstGeom prst="rect">
+            <a:avLst/>
+          </a:prstGeom>
+          <a:noFill/>
+          <a:ln/>
+        </p:spPr>
+        <p:txBody>
+          <a:bodyPr wrap="square" lIns="0" tIns="0" rIns="0" bIns="0" rtlCol="0" anchor="ctr">
+            <a:normAutofit/>
+          </a:bodyPr>
           <a:lstStyle/>
           <a:p>
             <a:pPr algn="ctr" indent="0" marL="0">
+              <a:lnSpc>
+                <a:spcPts val="1300"/>
+              </a:lnSpc>
+              <a:buNone/>
+            </a:pPr>
+            <a:r>
+              <a:rPr lang="en-US" sz="1300" b="1" dirty="0">
+                <a:solidFill>
+                  <a:srgbClr val="0F766E"/>
+                </a:solidFill>
+                <a:latin typeface="Meiryo" pitchFamily="34" charset="0"/>
+                <a:ea typeface="Meiryo" pitchFamily="34" charset="-122"/>
+                <a:cs typeface="Meiryo" pitchFamily="34" charset="-120"/>
+              </a:rPr>
+              <a:t>1</a:t>
+            </a:r>
+            <a:endParaRPr lang="en-US" sz="1300" dirty="0"/>
+          </a:p>
+        </p:txBody>
+      </p:sp>
+      <p:sp>
+        <p:nvSpPr>
+          <p:cNvPr id="7" name="Text 5"/>
+          <p:cNvSpPr txBox="1"/>
+          <p:nvPr/>
+        </p:nvSpPr>
+        <p:spPr>
+          <a:xfrm>
+            <a:off x="1152144" y="2386584"/>
+            <a:ext cx="2926080" cy="310896"/>
+          </a:xfrm>
+          <a:prstGeom prst="rect">
+            <a:avLst/>
+          </a:prstGeom>
+          <a:noFill/>
+          <a:ln/>
+        </p:spPr>
+        <p:txBody>
+          <a:bodyPr wrap="square" lIns="0" tIns="0" rIns="0" bIns="0" rtlCol="0" anchor="ctr">
+            <a:normAutofit/>
+          </a:bodyPr>
+          <a:lstStyle/>
+          <a:p>
+            <a:pPr indent="0" marL="0">
+              <a:lnSpc>
+                <a:spcPts val="2000"/>
+              </a:lnSpc>
               <a:buNone/>
             </a:pPr>
             <a:r>
               <a:rPr lang="en-US" sz="1400" b="1" dirty="0">
                 <a:solidFill>
-                  <a:srgbClr val="0F766E"/>
-                </a:solidFill>
-                <a:latin typeface="Meiryo" pitchFamily="34" charset="0"/>
-                <a:ea typeface="Meiryo" pitchFamily="34" charset="-122"/>
-                <a:cs typeface="Meiryo" pitchFamily="34" charset="-120"/>
-              </a:rPr>
-              <a:t>1</a:t>
+                  <a:srgbClr val="1C2422"/>
+                </a:solidFill>
+                <a:latin typeface="Meiryo" pitchFamily="34" charset="0"/>
+                <a:ea typeface="Meiryo" pitchFamily="34" charset="-122"/>
+                <a:cs typeface="Meiryo" pitchFamily="34" charset="-120"/>
+              </a:rPr>
+              <a:t>起き上がる・座る</a:t>
             </a:r>
             <a:endParaRPr lang="en-US" sz="1400" dirty="0"/>
           </a:p>
@@ -3873,69 +3854,35 @@
       </p:sp>
       <p:sp>
         <p:nvSpPr>
-          <p:cNvPr id="7" name="Text 5"/>
-          <p:cNvSpPr txBox="1"/>
-          <p:nvPr/>
-        </p:nvSpPr>
-        <p:spPr>
-          <a:xfrm>
-            <a:off x="1188720" y="2231136"/>
-            <a:ext cx="2743200" cy="274320"/>
-          </a:xfrm>
-          <a:prstGeom prst="rect">
-            <a:avLst/>
-          </a:prstGeom>
-          <a:noFill/>
-          <a:ln/>
-        </p:spPr>
-        <p:txBody>
-          <a:bodyPr wrap="square" lIns="0" tIns="0" rIns="0" bIns="0" rtlCol="0" anchor="ctr"/>
+          <p:cNvPr id="8" name="Text 6"/>
+          <p:cNvSpPr txBox="1"/>
+          <p:nvPr/>
+        </p:nvSpPr>
+        <p:spPr>
+          <a:xfrm>
+            <a:off x="1152144" y="2679192"/>
+            <a:ext cx="7223760" cy="292608"/>
+          </a:xfrm>
+          <a:prstGeom prst="rect">
+            <a:avLst/>
+          </a:prstGeom>
+          <a:noFill/>
+          <a:ln/>
+        </p:spPr>
+        <p:txBody>
+          <a:bodyPr wrap="square" lIns="0" tIns="0" rIns="0" bIns="0" rtlCol="0" anchor="ctr">
+            <a:normAutofit/>
+          </a:bodyPr>
           <a:lstStyle/>
           <a:p>
             <a:pPr indent="0" marL="0">
-              <a:buNone/>
-            </a:pPr>
-            <a:r>
-              <a:rPr lang="en-US" sz="1450" b="1" dirty="0">
-                <a:solidFill>
-                  <a:srgbClr val="1C2422"/>
-                </a:solidFill>
-                <a:latin typeface="Meiryo" pitchFamily="34" charset="0"/>
-                <a:ea typeface="Meiryo" pitchFamily="34" charset="-122"/>
-                <a:cs typeface="Meiryo" pitchFamily="34" charset="-120"/>
-              </a:rPr>
-              <a:t>起き上がる・座る</a:t>
-            </a:r>
-            <a:endParaRPr lang="en-US" sz="1450" dirty="0"/>
-          </a:p>
-        </p:txBody>
-      </p:sp>
-      <p:sp>
-        <p:nvSpPr>
-          <p:cNvPr id="8" name="Text 6"/>
-          <p:cNvSpPr txBox="1"/>
-          <p:nvPr/>
-        </p:nvSpPr>
-        <p:spPr>
-          <a:xfrm>
-            <a:off x="1188720" y="2487168"/>
-            <a:ext cx="7223760" cy="274320"/>
-          </a:xfrm>
-          <a:prstGeom prst="rect">
-            <a:avLst/>
-          </a:prstGeom>
-          <a:noFill/>
-          <a:ln/>
-        </p:spPr>
-        <p:txBody>
-          <a:bodyPr wrap="square" lIns="0" tIns="0" rIns="0" bIns="0" rtlCol="0" anchor="ctr"/>
-          <a:lstStyle/>
-          <a:p>
-            <a:pPr indent="0" marL="0">
-              <a:buNone/>
-            </a:pPr>
-            <a:r>
-              <a:rPr lang="en-US" sz="1200" dirty="0">
+              <a:lnSpc>
+                <a:spcPts val="1700"/>
+              </a:lnSpc>
+              <a:buNone/>
+            </a:pPr>
+            <a:r>
+              <a:rPr lang="en-US" sz="1150" dirty="0">
                 <a:solidFill>
                   <a:srgbClr val="5D6B66"/>
                 </a:solidFill>
@@ -3945,7 +3892,7 @@
               </a:rPr>
               <a:t>痛みが強いと、体を起こすだけで時間がかかります。</a:t>
             </a:r>
-            <a:endParaRPr lang="en-US" sz="1200" dirty="0"/>
+            <a:endParaRPr lang="en-US" sz="1150" dirty="0"/>
           </a:p>
         </p:txBody>
       </p:sp>
@@ -3957,8 +3904,8 @@
         </p:nvSpPr>
         <p:spPr>
           <a:xfrm>
-            <a:off x="566928" y="2834640"/>
-            <a:ext cx="457200" cy="457200"/>
+            <a:off x="566928" y="3054096"/>
+            <a:ext cx="420624" cy="420624"/>
           </a:xfrm>
           <a:prstGeom prst="ellipse">
             <a:avLst/>
@@ -3977,32 +3924,81 @@
         </p:nvSpPr>
         <p:spPr>
           <a:xfrm>
-            <a:off x="566928" y="2834640"/>
-            <a:ext cx="457200" cy="457200"/>
-          </a:xfrm>
-          <a:prstGeom prst="rect">
-            <a:avLst/>
-          </a:prstGeom>
-          <a:noFill/>
-          <a:ln/>
-        </p:spPr>
-        <p:txBody>
-          <a:bodyPr wrap="square" lIns="0" tIns="0" rIns="0" bIns="0" rtlCol="0" anchor="ctr"/>
+            <a:off x="566928" y="3054096"/>
+            <a:ext cx="420624" cy="420624"/>
+          </a:xfrm>
+          <a:prstGeom prst="rect">
+            <a:avLst/>
+          </a:prstGeom>
+          <a:noFill/>
+          <a:ln/>
+        </p:spPr>
+        <p:txBody>
+          <a:bodyPr wrap="square" lIns="0" tIns="0" rIns="0" bIns="0" rtlCol="0" anchor="ctr">
+            <a:normAutofit/>
+          </a:bodyPr>
           <a:lstStyle/>
           <a:p>
             <a:pPr algn="ctr" indent="0" marL="0">
+              <a:lnSpc>
+                <a:spcPts val="1300"/>
+              </a:lnSpc>
+              <a:buNone/>
+            </a:pPr>
+            <a:r>
+              <a:rPr lang="en-US" sz="1300" b="1" dirty="0">
+                <a:solidFill>
+                  <a:srgbClr val="0F766E"/>
+                </a:solidFill>
+                <a:latin typeface="Meiryo" pitchFamily="34" charset="0"/>
+                <a:ea typeface="Meiryo" pitchFamily="34" charset="-122"/>
+                <a:cs typeface="Meiryo" pitchFamily="34" charset="-120"/>
+              </a:rPr>
+              <a:t>2</a:t>
+            </a:r>
+            <a:endParaRPr lang="en-US" sz="1300" dirty="0"/>
+          </a:p>
+        </p:txBody>
+      </p:sp>
+      <p:sp>
+        <p:nvSpPr>
+          <p:cNvPr id="11" name="Text 9"/>
+          <p:cNvSpPr txBox="1"/>
+          <p:nvPr/>
+        </p:nvSpPr>
+        <p:spPr>
+          <a:xfrm>
+            <a:off x="1152144" y="3008376"/>
+            <a:ext cx="2926080" cy="310896"/>
+          </a:xfrm>
+          <a:prstGeom prst="rect">
+            <a:avLst/>
+          </a:prstGeom>
+          <a:noFill/>
+          <a:ln/>
+        </p:spPr>
+        <p:txBody>
+          <a:bodyPr wrap="square" lIns="0" tIns="0" rIns="0" bIns="0" rtlCol="0" anchor="ctr">
+            <a:normAutofit/>
+          </a:bodyPr>
+          <a:lstStyle/>
+          <a:p>
+            <a:pPr indent="0" marL="0">
+              <a:lnSpc>
+                <a:spcPts val="2000"/>
+              </a:lnSpc>
               <a:buNone/>
             </a:pPr>
             <a:r>
               <a:rPr lang="en-US" sz="1400" b="1" dirty="0">
                 <a:solidFill>
-                  <a:srgbClr val="0F766E"/>
-                </a:solidFill>
-                <a:latin typeface="Meiryo" pitchFamily="34" charset="0"/>
-                <a:ea typeface="Meiryo" pitchFamily="34" charset="-122"/>
-                <a:cs typeface="Meiryo" pitchFamily="34" charset="-120"/>
-              </a:rPr>
-              <a:t>2</a:t>
+                  <a:srgbClr val="1C2422"/>
+                </a:solidFill>
+                <a:latin typeface="Meiryo" pitchFamily="34" charset="0"/>
+                <a:ea typeface="Meiryo" pitchFamily="34" charset="-122"/>
+                <a:cs typeface="Meiryo" pitchFamily="34" charset="-120"/>
+              </a:rPr>
+              <a:t>歩く</a:t>
             </a:r>
             <a:endParaRPr lang="en-US" sz="1400" dirty="0"/>
           </a:p>
@@ -4010,69 +4006,35 @@
       </p:sp>
       <p:sp>
         <p:nvSpPr>
-          <p:cNvPr id="11" name="Text 9"/>
-          <p:cNvSpPr txBox="1"/>
-          <p:nvPr/>
-        </p:nvSpPr>
-        <p:spPr>
-          <a:xfrm>
-            <a:off x="1188720" y="2816352"/>
-            <a:ext cx="2743200" cy="274320"/>
-          </a:xfrm>
-          <a:prstGeom prst="rect">
-            <a:avLst/>
-          </a:prstGeom>
-          <a:noFill/>
-          <a:ln/>
-        </p:spPr>
-        <p:txBody>
-          <a:bodyPr wrap="square" lIns="0" tIns="0" rIns="0" bIns="0" rtlCol="0" anchor="ctr"/>
+          <p:cNvPr id="12" name="Text 10"/>
+          <p:cNvSpPr txBox="1"/>
+          <p:nvPr/>
+        </p:nvSpPr>
+        <p:spPr>
+          <a:xfrm>
+            <a:off x="1152144" y="3300984"/>
+            <a:ext cx="7223760" cy="292608"/>
+          </a:xfrm>
+          <a:prstGeom prst="rect">
+            <a:avLst/>
+          </a:prstGeom>
+          <a:noFill/>
+          <a:ln/>
+        </p:spPr>
+        <p:txBody>
+          <a:bodyPr wrap="square" lIns="0" tIns="0" rIns="0" bIns="0" rtlCol="0" anchor="ctr">
+            <a:normAutofit/>
+          </a:bodyPr>
           <a:lstStyle/>
           <a:p>
             <a:pPr indent="0" marL="0">
-              <a:buNone/>
-            </a:pPr>
-            <a:r>
-              <a:rPr lang="en-US" sz="1450" b="1" dirty="0">
-                <a:solidFill>
-                  <a:srgbClr val="1C2422"/>
-                </a:solidFill>
-                <a:latin typeface="Meiryo" pitchFamily="34" charset="0"/>
-                <a:ea typeface="Meiryo" pitchFamily="34" charset="-122"/>
-                <a:cs typeface="Meiryo" pitchFamily="34" charset="-120"/>
-              </a:rPr>
-              <a:t>歩く</a:t>
-            </a:r>
-            <a:endParaRPr lang="en-US" sz="1450" dirty="0"/>
-          </a:p>
-        </p:txBody>
-      </p:sp>
-      <p:sp>
-        <p:nvSpPr>
-          <p:cNvPr id="12" name="Text 10"/>
-          <p:cNvSpPr txBox="1"/>
-          <p:nvPr/>
-        </p:nvSpPr>
-        <p:spPr>
-          <a:xfrm>
-            <a:off x="1188720" y="3072384"/>
-            <a:ext cx="7223760" cy="274320"/>
-          </a:xfrm>
-          <a:prstGeom prst="rect">
-            <a:avLst/>
-          </a:prstGeom>
-          <a:noFill/>
-          <a:ln/>
-        </p:spPr>
-        <p:txBody>
-          <a:bodyPr wrap="square" lIns="0" tIns="0" rIns="0" bIns="0" rtlCol="0" anchor="ctr"/>
-          <a:lstStyle/>
-          <a:p>
-            <a:pPr indent="0" marL="0">
-              <a:buNone/>
-            </a:pPr>
-            <a:r>
-              <a:rPr lang="en-US" sz="1200" dirty="0">
+              <a:lnSpc>
+                <a:spcPts val="1700"/>
+              </a:lnSpc>
+              <a:buNone/>
+            </a:pPr>
+            <a:r>
+              <a:rPr lang="en-US" sz="1150" dirty="0">
                 <a:solidFill>
                   <a:srgbClr val="5D6B66"/>
                 </a:solidFill>
@@ -4082,7 +4044,7 @@
               </a:rPr>
               <a:t>手術のあとは、早めに歩くようにお願いすることがあります。</a:t>
             </a:r>
-            <a:endParaRPr lang="en-US" sz="1200" dirty="0"/>
+            <a:endParaRPr lang="en-US" sz="1150" dirty="0"/>
           </a:p>
         </p:txBody>
       </p:sp>
@@ -4094,8 +4056,8 @@
         </p:nvSpPr>
         <p:spPr>
           <a:xfrm>
-            <a:off x="566928" y="3419856"/>
-            <a:ext cx="457200" cy="457200"/>
+            <a:off x="566928" y="3675888"/>
+            <a:ext cx="420624" cy="420624"/>
           </a:xfrm>
           <a:prstGeom prst="ellipse">
             <a:avLst/>
@@ -4114,32 +4076,81 @@
         </p:nvSpPr>
         <p:spPr>
           <a:xfrm>
-            <a:off x="566928" y="3419856"/>
-            <a:ext cx="457200" cy="457200"/>
-          </a:xfrm>
-          <a:prstGeom prst="rect">
-            <a:avLst/>
-          </a:prstGeom>
-          <a:noFill/>
-          <a:ln/>
-        </p:spPr>
-        <p:txBody>
-          <a:bodyPr wrap="square" lIns="0" tIns="0" rIns="0" bIns="0" rtlCol="0" anchor="ctr"/>
+            <a:off x="566928" y="3675888"/>
+            <a:ext cx="420624" cy="420624"/>
+          </a:xfrm>
+          <a:prstGeom prst="rect">
+            <a:avLst/>
+          </a:prstGeom>
+          <a:noFill/>
+          <a:ln/>
+        </p:spPr>
+        <p:txBody>
+          <a:bodyPr wrap="square" lIns="0" tIns="0" rIns="0" bIns="0" rtlCol="0" anchor="ctr">
+            <a:normAutofit/>
+          </a:bodyPr>
           <a:lstStyle/>
           <a:p>
             <a:pPr algn="ctr" indent="0" marL="0">
+              <a:lnSpc>
+                <a:spcPts val="1300"/>
+              </a:lnSpc>
+              <a:buNone/>
+            </a:pPr>
+            <a:r>
+              <a:rPr lang="en-US" sz="1300" b="1" dirty="0">
+                <a:solidFill>
+                  <a:srgbClr val="0F766E"/>
+                </a:solidFill>
+                <a:latin typeface="Meiryo" pitchFamily="34" charset="0"/>
+                <a:ea typeface="Meiryo" pitchFamily="34" charset="-122"/>
+                <a:cs typeface="Meiryo" pitchFamily="34" charset="-120"/>
+              </a:rPr>
+              <a:t>3</a:t>
+            </a:r>
+            <a:endParaRPr lang="en-US" sz="1300" dirty="0"/>
+          </a:p>
+        </p:txBody>
+      </p:sp>
+      <p:sp>
+        <p:nvSpPr>
+          <p:cNvPr id="15" name="Text 13"/>
+          <p:cNvSpPr txBox="1"/>
+          <p:nvPr/>
+        </p:nvSpPr>
+        <p:spPr>
+          <a:xfrm>
+            <a:off x="1152144" y="3630168"/>
+            <a:ext cx="2926080" cy="310896"/>
+          </a:xfrm>
+          <a:prstGeom prst="rect">
+            <a:avLst/>
+          </a:prstGeom>
+          <a:noFill/>
+          <a:ln/>
+        </p:spPr>
+        <p:txBody>
+          <a:bodyPr wrap="square" lIns="0" tIns="0" rIns="0" bIns="0" rtlCol="0" anchor="ctr">
+            <a:normAutofit/>
+          </a:bodyPr>
+          <a:lstStyle/>
+          <a:p>
+            <a:pPr indent="0" marL="0">
+              <a:lnSpc>
+                <a:spcPts val="2000"/>
+              </a:lnSpc>
               <a:buNone/>
             </a:pPr>
             <a:r>
               <a:rPr lang="en-US" sz="1400" b="1" dirty="0">
                 <a:solidFill>
-                  <a:srgbClr val="0F766E"/>
-                </a:solidFill>
-                <a:latin typeface="Meiryo" pitchFamily="34" charset="0"/>
-                <a:ea typeface="Meiryo" pitchFamily="34" charset="-122"/>
-                <a:cs typeface="Meiryo" pitchFamily="34" charset="-120"/>
-              </a:rPr>
-              <a:t>3</a:t>
+                  <a:srgbClr val="1C2422"/>
+                </a:solidFill>
+                <a:latin typeface="Meiryo" pitchFamily="34" charset="0"/>
+                <a:ea typeface="Meiryo" pitchFamily="34" charset="-122"/>
+                <a:cs typeface="Meiryo" pitchFamily="34" charset="-120"/>
+              </a:rPr>
+              <a:t>咳をする・深く息をする</a:t>
             </a:r>
             <a:endParaRPr lang="en-US" sz="1400" dirty="0"/>
           </a:p>
@@ -4147,69 +4158,35 @@
       </p:sp>
       <p:sp>
         <p:nvSpPr>
-          <p:cNvPr id="15" name="Text 13"/>
-          <p:cNvSpPr txBox="1"/>
-          <p:nvPr/>
-        </p:nvSpPr>
-        <p:spPr>
-          <a:xfrm>
-            <a:off x="1188720" y="3401568"/>
-            <a:ext cx="2743200" cy="274320"/>
-          </a:xfrm>
-          <a:prstGeom prst="rect">
-            <a:avLst/>
-          </a:prstGeom>
-          <a:noFill/>
-          <a:ln/>
-        </p:spPr>
-        <p:txBody>
-          <a:bodyPr wrap="square" lIns="0" tIns="0" rIns="0" bIns="0" rtlCol="0" anchor="ctr"/>
+          <p:cNvPr id="16" name="Text 14"/>
+          <p:cNvSpPr txBox="1"/>
+          <p:nvPr/>
+        </p:nvSpPr>
+        <p:spPr>
+          <a:xfrm>
+            <a:off x="1152144" y="3922776"/>
+            <a:ext cx="7223760" cy="292608"/>
+          </a:xfrm>
+          <a:prstGeom prst="rect">
+            <a:avLst/>
+          </a:prstGeom>
+          <a:noFill/>
+          <a:ln/>
+        </p:spPr>
+        <p:txBody>
+          <a:bodyPr wrap="square" lIns="0" tIns="0" rIns="0" bIns="0" rtlCol="0" anchor="ctr">
+            <a:normAutofit/>
+          </a:bodyPr>
           <a:lstStyle/>
           <a:p>
             <a:pPr indent="0" marL="0">
-              <a:buNone/>
-            </a:pPr>
-            <a:r>
-              <a:rPr lang="en-US" sz="1450" b="1" dirty="0">
-                <a:solidFill>
-                  <a:srgbClr val="1C2422"/>
-                </a:solidFill>
-                <a:latin typeface="Meiryo" pitchFamily="34" charset="0"/>
-                <a:ea typeface="Meiryo" pitchFamily="34" charset="-122"/>
-                <a:cs typeface="Meiryo" pitchFamily="34" charset="-120"/>
-              </a:rPr>
-              <a:t>咳をする・深く息をする</a:t>
-            </a:r>
-            <a:endParaRPr lang="en-US" sz="1450" dirty="0"/>
-          </a:p>
-        </p:txBody>
-      </p:sp>
-      <p:sp>
-        <p:nvSpPr>
-          <p:cNvPr id="16" name="Text 14"/>
-          <p:cNvSpPr txBox="1"/>
-          <p:nvPr/>
-        </p:nvSpPr>
-        <p:spPr>
-          <a:xfrm>
-            <a:off x="1188720" y="3657600"/>
-            <a:ext cx="7223760" cy="274320"/>
-          </a:xfrm>
-          <a:prstGeom prst="rect">
-            <a:avLst/>
-          </a:prstGeom>
-          <a:noFill/>
-          <a:ln/>
-        </p:spPr>
-        <p:txBody>
-          <a:bodyPr wrap="square" lIns="0" tIns="0" rIns="0" bIns="0" rtlCol="0" anchor="ctr"/>
-          <a:lstStyle/>
-          <a:p>
-            <a:pPr indent="0" marL="0">
-              <a:buNone/>
-            </a:pPr>
-            <a:r>
-              <a:rPr lang="en-US" sz="1200" dirty="0">
+              <a:lnSpc>
+                <a:spcPts val="1700"/>
+              </a:lnSpc>
+              <a:buNone/>
+            </a:pPr>
+            <a:r>
+              <a:rPr lang="en-US" sz="1150" dirty="0">
                 <a:solidFill>
                   <a:srgbClr val="5D6B66"/>
                 </a:solidFill>
@@ -4219,7 +4196,7 @@
               </a:rPr>
               <a:t>痛くて浅い息のままだと、痰を出しにくくなります。</a:t>
             </a:r>
-            <a:endParaRPr lang="en-US" sz="1200" dirty="0"/>
+            <a:endParaRPr lang="en-US" sz="1150" dirty="0"/>
           </a:p>
         </p:txBody>
       </p:sp>
@@ -4231,8 +4208,8 @@
         </p:nvSpPr>
         <p:spPr>
           <a:xfrm>
-            <a:off x="566928" y="4005072"/>
-            <a:ext cx="457200" cy="457200"/>
+            <a:off x="566928" y="4297680"/>
+            <a:ext cx="420624" cy="420624"/>
           </a:xfrm>
           <a:prstGeom prst="ellipse">
             <a:avLst/>
@@ -4251,32 +4228,81 @@
         </p:nvSpPr>
         <p:spPr>
           <a:xfrm>
-            <a:off x="566928" y="4005072"/>
-            <a:ext cx="457200" cy="457200"/>
-          </a:xfrm>
-          <a:prstGeom prst="rect">
-            <a:avLst/>
-          </a:prstGeom>
-          <a:noFill/>
-          <a:ln/>
-        </p:spPr>
-        <p:txBody>
-          <a:bodyPr wrap="square" lIns="0" tIns="0" rIns="0" bIns="0" rtlCol="0" anchor="ctr"/>
+            <a:off x="566928" y="4297680"/>
+            <a:ext cx="420624" cy="420624"/>
+          </a:xfrm>
+          <a:prstGeom prst="rect">
+            <a:avLst/>
+          </a:prstGeom>
+          <a:noFill/>
+          <a:ln/>
+        </p:spPr>
+        <p:txBody>
+          <a:bodyPr wrap="square" lIns="0" tIns="0" rIns="0" bIns="0" rtlCol="0" anchor="ctr">
+            <a:normAutofit/>
+          </a:bodyPr>
           <a:lstStyle/>
           <a:p>
             <a:pPr algn="ctr" indent="0" marL="0">
+              <a:lnSpc>
+                <a:spcPts val="1300"/>
+              </a:lnSpc>
+              <a:buNone/>
+            </a:pPr>
+            <a:r>
+              <a:rPr lang="en-US" sz="1300" b="1" dirty="0">
+                <a:solidFill>
+                  <a:srgbClr val="0F766E"/>
+                </a:solidFill>
+                <a:latin typeface="Meiryo" pitchFamily="34" charset="0"/>
+                <a:ea typeface="Meiryo" pitchFamily="34" charset="-122"/>
+                <a:cs typeface="Meiryo" pitchFamily="34" charset="-120"/>
+              </a:rPr>
+              <a:t>4</a:t>
+            </a:r>
+            <a:endParaRPr lang="en-US" sz="1300" dirty="0"/>
+          </a:p>
+        </p:txBody>
+      </p:sp>
+      <p:sp>
+        <p:nvSpPr>
+          <p:cNvPr id="19" name="Text 17"/>
+          <p:cNvSpPr txBox="1"/>
+          <p:nvPr/>
+        </p:nvSpPr>
+        <p:spPr>
+          <a:xfrm>
+            <a:off x="1152144" y="4251960"/>
+            <a:ext cx="2926080" cy="310896"/>
+          </a:xfrm>
+          <a:prstGeom prst="rect">
+            <a:avLst/>
+          </a:prstGeom>
+          <a:noFill/>
+          <a:ln/>
+        </p:spPr>
+        <p:txBody>
+          <a:bodyPr wrap="square" lIns="0" tIns="0" rIns="0" bIns="0" rtlCol="0" anchor="ctr">
+            <a:normAutofit/>
+          </a:bodyPr>
+          <a:lstStyle/>
+          <a:p>
+            <a:pPr indent="0" marL="0">
+              <a:lnSpc>
+                <a:spcPts val="2000"/>
+              </a:lnSpc>
               <a:buNone/>
             </a:pPr>
             <a:r>
               <a:rPr lang="en-US" sz="1400" b="1" dirty="0">
                 <a:solidFill>
-                  <a:srgbClr val="0F766E"/>
-                </a:solidFill>
-                <a:latin typeface="Meiryo" pitchFamily="34" charset="0"/>
-                <a:ea typeface="Meiryo" pitchFamily="34" charset="-122"/>
-                <a:cs typeface="Meiryo" pitchFamily="34" charset="-120"/>
-              </a:rPr>
-              <a:t>4</a:t>
+                  <a:srgbClr val="1C2422"/>
+                </a:solidFill>
+                <a:latin typeface="Meiryo" pitchFamily="34" charset="0"/>
+                <a:ea typeface="Meiryo" pitchFamily="34" charset="-122"/>
+                <a:cs typeface="Meiryo" pitchFamily="34" charset="-120"/>
+              </a:rPr>
+              <a:t>眠る</a:t>
             </a:r>
             <a:endParaRPr lang="en-US" sz="1400" dirty="0"/>
           </a:p>
@@ -4284,69 +4310,35 @@
       </p:sp>
       <p:sp>
         <p:nvSpPr>
-          <p:cNvPr id="19" name="Text 17"/>
-          <p:cNvSpPr txBox="1"/>
-          <p:nvPr/>
-        </p:nvSpPr>
-        <p:spPr>
-          <a:xfrm>
-            <a:off x="1188720" y="3986784"/>
-            <a:ext cx="2743200" cy="274320"/>
-          </a:xfrm>
-          <a:prstGeom prst="rect">
-            <a:avLst/>
-          </a:prstGeom>
-          <a:noFill/>
-          <a:ln/>
-        </p:spPr>
-        <p:txBody>
-          <a:bodyPr wrap="square" lIns="0" tIns="0" rIns="0" bIns="0" rtlCol="0" anchor="ctr"/>
+          <p:cNvPr id="20" name="Text 18"/>
+          <p:cNvSpPr txBox="1"/>
+          <p:nvPr/>
+        </p:nvSpPr>
+        <p:spPr>
+          <a:xfrm>
+            <a:off x="1152144" y="4544568"/>
+            <a:ext cx="7223760" cy="292608"/>
+          </a:xfrm>
+          <a:prstGeom prst="rect">
+            <a:avLst/>
+          </a:prstGeom>
+          <a:noFill/>
+          <a:ln/>
+        </p:spPr>
+        <p:txBody>
+          <a:bodyPr wrap="square" lIns="0" tIns="0" rIns="0" bIns="0" rtlCol="0" anchor="ctr">
+            <a:normAutofit/>
+          </a:bodyPr>
           <a:lstStyle/>
           <a:p>
             <a:pPr indent="0" marL="0">
-              <a:buNone/>
-            </a:pPr>
-            <a:r>
-              <a:rPr lang="en-US" sz="1450" b="1" dirty="0">
-                <a:solidFill>
-                  <a:srgbClr val="1C2422"/>
-                </a:solidFill>
-                <a:latin typeface="Meiryo" pitchFamily="34" charset="0"/>
-                <a:ea typeface="Meiryo" pitchFamily="34" charset="-122"/>
-                <a:cs typeface="Meiryo" pitchFamily="34" charset="-120"/>
-              </a:rPr>
-              <a:t>眠る</a:t>
-            </a:r>
-            <a:endParaRPr lang="en-US" sz="1450" dirty="0"/>
-          </a:p>
-        </p:txBody>
-      </p:sp>
-      <p:sp>
-        <p:nvSpPr>
-          <p:cNvPr id="20" name="Text 18"/>
-          <p:cNvSpPr txBox="1"/>
-          <p:nvPr/>
-        </p:nvSpPr>
-        <p:spPr>
-          <a:xfrm>
-            <a:off x="1188720" y="4242816"/>
-            <a:ext cx="7223760" cy="274320"/>
-          </a:xfrm>
-          <a:prstGeom prst="rect">
-            <a:avLst/>
-          </a:prstGeom>
-          <a:noFill/>
-          <a:ln/>
-        </p:spPr>
-        <p:txBody>
-          <a:bodyPr wrap="square" lIns="0" tIns="0" rIns="0" bIns="0" rtlCol="0" anchor="ctr"/>
-          <a:lstStyle/>
-          <a:p>
-            <a:pPr indent="0" marL="0">
-              <a:buNone/>
-            </a:pPr>
-            <a:r>
-              <a:rPr lang="en-US" sz="1200" dirty="0">
+              <a:lnSpc>
+                <a:spcPts val="1700"/>
+              </a:lnSpc>
+              <a:buNone/>
+            </a:pPr>
+            <a:r>
+              <a:rPr lang="en-US" sz="1150" dirty="0">
                 <a:solidFill>
                   <a:srgbClr val="5D6B66"/>
                 </a:solidFill>
@@ -4356,46 +4348,7 @@
               </a:rPr>
               <a:t>夜に痛みで目が覚めると、休めません。</a:t>
             </a:r>
-            <a:endParaRPr lang="en-US" sz="1200" dirty="0"/>
-          </a:p>
-        </p:txBody>
-      </p:sp>
-      <p:sp>
-        <p:nvSpPr>
-          <p:cNvPr id="21" name="Text 19"/>
-          <p:cNvSpPr txBox="1"/>
-          <p:nvPr/>
-        </p:nvSpPr>
-        <p:spPr>
-          <a:xfrm>
-            <a:off x="548640" y="4718304"/>
-            <a:ext cx="5943600" cy="237744"/>
-          </a:xfrm>
-          <a:prstGeom prst="rect">
-            <a:avLst/>
-          </a:prstGeom>
-          <a:noFill/>
-          <a:ln/>
-        </p:spPr>
-        <p:txBody>
-          <a:bodyPr wrap="square" lIns="0" tIns="0" rIns="0" bIns="0" rtlCol="0" anchor="ctr"/>
-          <a:lstStyle/>
-          <a:p>
-            <a:pPr indent="0" marL="0">
-              <a:buNone/>
-            </a:pPr>
-            <a:r>
-              <a:rPr lang="en-US" sz="950" dirty="0">
-                <a:solidFill>
-                  <a:srgbClr val="5D6B66"/>
-                </a:solidFill>
-                <a:latin typeface="Meiryo" pitchFamily="34" charset="0"/>
-                <a:ea typeface="Meiryo" pitchFamily="34" charset="-122"/>
-                <a:cs typeface="Meiryo" pitchFamily="34" charset="-120"/>
-              </a:rPr>
-              <a:t>自主制作サンプル｜ヨアケ（看護師12年・手術室勤務あり）</a:t>
-            </a:r>
-            <a:endParaRPr lang="en-US" sz="950" dirty="0"/>
+            <a:endParaRPr lang="en-US" sz="1150" dirty="0"/>
           </a:p>
         </p:txBody>
       </p:sp>
@@ -4432,20 +4385,25 @@
         </p:nvSpPr>
         <p:spPr>
           <a:xfrm>
-            <a:off x="548640" y="384048"/>
-            <a:ext cx="8046720" cy="640080"/>
-          </a:xfrm>
-          <a:prstGeom prst="rect">
-            <a:avLst/>
-          </a:prstGeom>
-          <a:noFill/>
-          <a:ln/>
-        </p:spPr>
-        <p:txBody>
-          <a:bodyPr wrap="square" lIns="0" tIns="0" rIns="0" bIns="0" rtlCol="0" anchor="ctr"/>
+            <a:off x="548640" y="365760"/>
+            <a:ext cx="8046720" cy="731520"/>
+          </a:xfrm>
+          <a:prstGeom prst="rect">
+            <a:avLst/>
+          </a:prstGeom>
+          <a:noFill/>
+          <a:ln/>
+        </p:spPr>
+        <p:txBody>
+          <a:bodyPr wrap="square" lIns="0" tIns="0" rIns="0" bIns="0" rtlCol="0" anchor="ctr">
+            <a:normAutofit/>
+          </a:bodyPr>
           <a:lstStyle/>
           <a:p>
             <a:pPr indent="0" marL="0">
+              <a:lnSpc>
+                <a:spcPts val="4400"/>
+              </a:lnSpc>
               <a:buNone/>
             </a:pPr>
             <a:r>
@@ -4471,20 +4429,25 @@
         </p:nvSpPr>
         <p:spPr>
           <a:xfrm>
-            <a:off x="548640" y="1042416"/>
-            <a:ext cx="8046720" cy="310896"/>
-          </a:xfrm>
-          <a:prstGeom prst="rect">
-            <a:avLst/>
-          </a:prstGeom>
-          <a:noFill/>
-          <a:ln/>
-        </p:spPr>
-        <p:txBody>
-          <a:bodyPr wrap="square" lIns="0" tIns="0" rIns="0" bIns="0" rtlCol="0" anchor="ctr"/>
+            <a:off x="548640" y="1078992"/>
+            <a:ext cx="8046720" cy="329184"/>
+          </a:xfrm>
+          <a:prstGeom prst="rect">
+            <a:avLst/>
+          </a:prstGeom>
+          <a:noFill/>
+          <a:ln/>
+        </p:spPr>
+        <p:txBody>
+          <a:bodyPr wrap="square" lIns="0" tIns="0" rIns="0" bIns="0" rtlCol="0" anchor="ctr">
+            <a:normAutofit/>
+          </a:bodyPr>
           <a:lstStyle/>
           <a:p>
             <a:pPr indent="0" marL="0">
+              <a:lnSpc>
+                <a:spcPts val="1900"/>
+              </a:lnSpc>
               <a:buNone/>
             </a:pPr>
             <a:r>
@@ -4510,12 +4473,12 @@
         </p:nvSpPr>
         <p:spPr>
           <a:xfrm>
-            <a:off x="548640" y="1572768"/>
-            <a:ext cx="8046720" cy="749808"/>
+            <a:off x="548640" y="1645920"/>
+            <a:ext cx="8046720" cy="822960"/>
           </a:xfrm>
           <a:prstGeom prst="roundRect">
             <a:avLst>
-              <a:gd name="adj" fmla="val 17073"/>
+              <a:gd name="adj" fmla="val 15556"/>
             </a:avLst>
           </a:prstGeom>
           <a:solidFill>
@@ -4537,24 +4500,29 @@
         </p:nvSpPr>
         <p:spPr>
           <a:xfrm>
-            <a:off x="914400" y="1618488"/>
-            <a:ext cx="7315200" cy="658368"/>
-          </a:xfrm>
-          <a:prstGeom prst="rect">
-            <a:avLst/>
-          </a:prstGeom>
-          <a:noFill/>
-          <a:ln/>
-        </p:spPr>
-        <p:txBody>
-          <a:bodyPr wrap="square" lIns="0" tIns="0" rIns="0" bIns="0" rtlCol="0" anchor="ctr"/>
+            <a:off x="914400" y="1691640"/>
+            <a:ext cx="7315200" cy="731520"/>
+          </a:xfrm>
+          <a:prstGeom prst="rect">
+            <a:avLst/>
+          </a:prstGeom>
+          <a:noFill/>
+          <a:ln/>
+        </p:spPr>
+        <p:txBody>
+          <a:bodyPr wrap="square" lIns="0" tIns="0" rIns="0" bIns="0" rtlCol="0" anchor="ctr">
+            <a:normAutofit/>
+          </a:bodyPr>
           <a:lstStyle/>
           <a:p>
             <a:pPr indent="0" marL="0">
-              <a:buNone/>
-            </a:pPr>
-            <a:r>
-              <a:rPr lang="en-US" sz="1600" b="1" dirty="0">
+              <a:lnSpc>
+                <a:spcPts val="2400"/>
+              </a:lnSpc>
+              <a:buNone/>
+            </a:pPr>
+            <a:r>
+              <a:rPr lang="en-US" sz="1550" b="1" dirty="0">
                 <a:solidFill>
                   <a:srgbClr val="0F766E"/>
                 </a:solidFill>
@@ -4564,7 +4532,7 @@
               </a:rPr>
               <a:t>「これくらいの痛みでも、痛み止めを使っていいですか？」</a:t>
             </a:r>
-            <a:endParaRPr lang="en-US" sz="1600" dirty="0"/>
+            <a:endParaRPr lang="en-US" sz="1550" dirty="0"/>
           </a:p>
         </p:txBody>
       </p:sp>
@@ -4576,12 +4544,12 @@
         </p:nvSpPr>
         <p:spPr>
           <a:xfrm>
-            <a:off x="548640" y="2532888"/>
-            <a:ext cx="8046720" cy="749808"/>
+            <a:off x="548640" y="2651760"/>
+            <a:ext cx="8046720" cy="822960"/>
           </a:xfrm>
           <a:prstGeom prst="roundRect">
             <a:avLst>
-              <a:gd name="adj" fmla="val 17073"/>
+              <a:gd name="adj" fmla="val 15556"/>
             </a:avLst>
           </a:prstGeom>
           <a:solidFill>
@@ -4603,24 +4571,29 @@
         </p:nvSpPr>
         <p:spPr>
           <a:xfrm>
-            <a:off x="914400" y="2578608"/>
-            <a:ext cx="7315200" cy="658368"/>
-          </a:xfrm>
-          <a:prstGeom prst="rect">
-            <a:avLst/>
-          </a:prstGeom>
-          <a:noFill/>
-          <a:ln/>
-        </p:spPr>
-        <p:txBody>
-          <a:bodyPr wrap="square" lIns="0" tIns="0" rIns="0" bIns="0" rtlCol="0" anchor="ctr"/>
+            <a:off x="914400" y="2697480"/>
+            <a:ext cx="7315200" cy="731520"/>
+          </a:xfrm>
+          <a:prstGeom prst="rect">
+            <a:avLst/>
+          </a:prstGeom>
+          <a:noFill/>
+          <a:ln/>
+        </p:spPr>
+        <p:txBody>
+          <a:bodyPr wrap="square" lIns="0" tIns="0" rIns="0" bIns="0" rtlCol="0" anchor="ctr">
+            <a:normAutofit/>
+          </a:bodyPr>
           <a:lstStyle/>
           <a:p>
             <a:pPr indent="0" marL="0">
-              <a:buNone/>
-            </a:pPr>
-            <a:r>
-              <a:rPr lang="en-US" sz="1600" b="1" dirty="0">
+              <a:lnSpc>
+                <a:spcPts val="2400"/>
+              </a:lnSpc>
+              <a:buNone/>
+            </a:pPr>
+            <a:r>
+              <a:rPr lang="en-US" sz="1550" b="1" dirty="0">
                 <a:solidFill>
                   <a:srgbClr val="0F766E"/>
                 </a:solidFill>
@@ -4630,7 +4603,7 @@
               </a:rPr>
               <a:t>「これから歩く練習なので、先に痛み止めをもらえますか？」</a:t>
             </a:r>
-            <a:endParaRPr lang="en-US" sz="1600" dirty="0"/>
+            <a:endParaRPr lang="en-US" sz="1550" dirty="0"/>
           </a:p>
         </p:txBody>
       </p:sp>
@@ -4642,27 +4615,29 @@
         </p:nvSpPr>
         <p:spPr>
           <a:xfrm>
-            <a:off x="548640" y="3611880"/>
-            <a:ext cx="8046720" cy="731520"/>
-          </a:xfrm>
-          <a:prstGeom prst="rect">
-            <a:avLst/>
-          </a:prstGeom>
-          <a:noFill/>
-          <a:ln/>
-        </p:spPr>
-        <p:txBody>
-          <a:bodyPr wrap="square" lIns="0" tIns="0" rIns="0" bIns="0" rtlCol="0" anchor="ctr"/>
+            <a:off x="548640" y="3749040"/>
+            <a:ext cx="8046720" cy="822960"/>
+          </a:xfrm>
+          <a:prstGeom prst="rect">
+            <a:avLst/>
+          </a:prstGeom>
+          <a:noFill/>
+          <a:ln/>
+        </p:spPr>
+        <p:txBody>
+          <a:bodyPr wrap="square" lIns="0" tIns="0" rIns="0" bIns="0" rtlCol="0" anchor="ctr">
+            <a:normAutofit/>
+          </a:bodyPr>
           <a:lstStyle/>
           <a:p>
             <a:pPr indent="0" marL="0">
               <a:lnSpc>
-                <a:spcPct val="120000"/>
-              </a:lnSpc>
-              <a:buNone/>
-            </a:pPr>
-            <a:r>
-              <a:rPr lang="en-US" sz="1350" dirty="0">
+                <a:spcPts val="2000"/>
+              </a:lnSpc>
+              <a:buNone/>
+            </a:pPr>
+            <a:r>
+              <a:rPr lang="en-US" sz="1300" dirty="0">
                 <a:solidFill>
                   <a:srgbClr val="1C2422"/>
                 </a:solidFill>
@@ -4670,29 +4645,9 @@
                 <a:ea typeface="Meiryo" pitchFamily="34" charset="-122"/>
                 <a:cs typeface="Meiryo" pitchFamily="34" charset="-120"/>
               </a:rPr>
-              <a:t>痛み止めを使いたいと言うことは、我慢が足りないということではありません。</a:t>
-            </a:r>
-            <a:endParaRPr lang="en-US" sz="1350" dirty="0"/>
-          </a:p>
-          <a:p>
-            <a:pPr indent="0" marL="0">
-              <a:lnSpc>
-                <a:spcPct val="120000"/>
-              </a:lnSpc>
-              <a:buNone/>
-            </a:pPr>
-            <a:r>
-              <a:rPr lang="en-US" sz="1350" dirty="0">
-                <a:solidFill>
-                  <a:srgbClr val="1C2422"/>
-                </a:solidFill>
-                <a:latin typeface="Meiryo" pitchFamily="34" charset="0"/>
-                <a:ea typeface="Meiryo" pitchFamily="34" charset="-122"/>
-                <a:cs typeface="Meiryo" pitchFamily="34" charset="-120"/>
-              </a:rPr>
-              <a:t>痛みが強いままだと、動くこと・休むことがどちらもしにくくなります。</a:t>
-            </a:r>
-            <a:endParaRPr lang="en-US" sz="1350" dirty="0"/>
+              <a:t>痛み止めを使いたいと言うことは、我慢が足りないということではありません。痛みが強いままだと、動くこと・休むことがどちらもしにくくなります。</a:t>
+            </a:r>
+            <a:endParaRPr lang="en-US" sz="1300" dirty="0"/>
           </a:p>
         </p:txBody>
       </p:sp>
@@ -4736,24 +4691,29 @@
         </p:nvSpPr>
         <p:spPr>
           <a:xfrm>
-            <a:off x="731520" y="548640"/>
-            <a:ext cx="7680960" cy="457200"/>
-          </a:xfrm>
-          <a:prstGeom prst="rect">
-            <a:avLst/>
-          </a:prstGeom>
-          <a:noFill/>
-          <a:ln/>
-        </p:spPr>
-        <p:txBody>
-          <a:bodyPr wrap="square" lIns="0" tIns="0" rIns="0" bIns="0" rtlCol="0" anchor="ctr"/>
+            <a:off x="731520" y="475488"/>
+            <a:ext cx="7680960" cy="603504"/>
+          </a:xfrm>
+          <a:prstGeom prst="rect">
+            <a:avLst/>
+          </a:prstGeom>
+          <a:noFill/>
+          <a:ln/>
+        </p:spPr>
+        <p:txBody>
+          <a:bodyPr wrap="square" lIns="0" tIns="0" rIns="0" bIns="0" rtlCol="0" anchor="ctr">
+            <a:normAutofit/>
+          </a:bodyPr>
           <a:lstStyle/>
           <a:p>
             <a:pPr indent="0" marL="0">
-              <a:buNone/>
-            </a:pPr>
-            <a:r>
-              <a:rPr lang="en-US" sz="2800" b="1" dirty="0">
+              <a:lnSpc>
+                <a:spcPts val="3900"/>
+              </a:lnSpc>
+              <a:buNone/>
+            </a:pPr>
+            <a:r>
+              <a:rPr lang="en-US" sz="2700" b="1" dirty="0">
                 <a:solidFill>
                   <a:srgbClr val="FFFFFF"/>
                 </a:solidFill>
@@ -4763,7 +4723,7 @@
               </a:rPr>
               <a:t>覚えていただきたいこと</a:t>
             </a:r>
-            <a:endParaRPr lang="en-US" sz="2800" dirty="0"/>
+            <a:endParaRPr lang="en-US" sz="2700" dirty="0"/>
           </a:p>
         </p:txBody>
       </p:sp>
@@ -4775,8 +4735,8 @@
         </p:nvSpPr>
         <p:spPr>
           <a:xfrm>
-            <a:off x="731520" y="1261872"/>
-            <a:ext cx="365760" cy="365760"/>
+            <a:off x="731520" y="1298448"/>
+            <a:ext cx="384048" cy="384048"/>
           </a:xfrm>
           <a:prstGeom prst="ellipse">
             <a:avLst/>
@@ -4795,20 +4755,25 @@
         </p:nvSpPr>
         <p:spPr>
           <a:xfrm>
-            <a:off x="731520" y="1261872"/>
-            <a:ext cx="365760" cy="365760"/>
-          </a:xfrm>
-          <a:prstGeom prst="rect">
-            <a:avLst/>
-          </a:prstGeom>
-          <a:noFill/>
-          <a:ln/>
-        </p:spPr>
-        <p:txBody>
-          <a:bodyPr wrap="square" lIns="0" tIns="0" rIns="0" bIns="0" rtlCol="0" anchor="ctr"/>
+            <a:off x="731520" y="1298448"/>
+            <a:ext cx="384048" cy="384048"/>
+          </a:xfrm>
+          <a:prstGeom prst="rect">
+            <a:avLst/>
+          </a:prstGeom>
+          <a:noFill/>
+          <a:ln/>
+        </p:spPr>
+        <p:txBody>
+          <a:bodyPr wrap="square" lIns="0" tIns="0" rIns="0" bIns="0" rtlCol="0" anchor="ctr">
+            <a:normAutofit/>
+          </a:bodyPr>
           <a:lstStyle/>
           <a:p>
             <a:pPr algn="ctr" indent="0" marL="0">
+              <a:lnSpc>
+                <a:spcPts val="1400"/>
+              </a:lnSpc>
               <a:buNone/>
             </a:pPr>
             <a:r>
@@ -4834,24 +4799,29 @@
         </p:nvSpPr>
         <p:spPr>
           <a:xfrm>
-            <a:off x="1280160" y="1243584"/>
-            <a:ext cx="7223760" cy="402336"/>
-          </a:xfrm>
-          <a:prstGeom prst="rect">
-            <a:avLst/>
-          </a:prstGeom>
-          <a:noFill/>
-          <a:ln/>
-        </p:spPr>
-        <p:txBody>
-          <a:bodyPr wrap="square" lIns="0" tIns="0" rIns="0" bIns="0" rtlCol="0" anchor="ctr"/>
+            <a:off x="1298448" y="1271016"/>
+            <a:ext cx="7223760" cy="438912"/>
+          </a:xfrm>
+          <a:prstGeom prst="rect">
+            <a:avLst/>
+          </a:prstGeom>
+          <a:noFill/>
+          <a:ln/>
+        </p:spPr>
+        <p:txBody>
+          <a:bodyPr wrap="square" lIns="0" tIns="0" rIns="0" bIns="0" rtlCol="0" anchor="ctr">
+            <a:normAutofit/>
+          </a:bodyPr>
           <a:lstStyle/>
           <a:p>
             <a:pPr indent="0" marL="0">
-              <a:buNone/>
-            </a:pPr>
-            <a:r>
-              <a:rPr lang="en-US" sz="1550" dirty="0">
+              <a:lnSpc>
+                <a:spcPts val="2200"/>
+              </a:lnSpc>
+              <a:buNone/>
+            </a:pPr>
+            <a:r>
+              <a:rPr lang="en-US" sz="1500" dirty="0">
                 <a:solidFill>
                   <a:srgbClr val="FFFFFF"/>
                 </a:solidFill>
@@ -4861,7 +4831,7 @@
               </a:rPr>
               <a:t>どのくらい痛いかは、人によって違います</a:t>
             </a:r>
-            <a:endParaRPr lang="en-US" sz="1550" dirty="0"/>
+            <a:endParaRPr lang="en-US" sz="1500" dirty="0"/>
           </a:p>
         </p:txBody>
       </p:sp>
@@ -4873,8 +4843,8 @@
         </p:nvSpPr>
         <p:spPr>
           <a:xfrm>
-            <a:off x="731520" y="1810512"/>
-            <a:ext cx="365760" cy="365760"/>
+            <a:off x="731520" y="1865376"/>
+            <a:ext cx="384048" cy="384048"/>
           </a:xfrm>
           <a:prstGeom prst="ellipse">
             <a:avLst/>
@@ -4893,20 +4863,25 @@
         </p:nvSpPr>
         <p:spPr>
           <a:xfrm>
-            <a:off x="731520" y="1810512"/>
-            <a:ext cx="365760" cy="365760"/>
-          </a:xfrm>
-          <a:prstGeom prst="rect">
-            <a:avLst/>
-          </a:prstGeom>
-          <a:noFill/>
-          <a:ln/>
-        </p:spPr>
-        <p:txBody>
-          <a:bodyPr wrap="square" lIns="0" tIns="0" rIns="0" bIns="0" rtlCol="0" anchor="ctr"/>
+            <a:off x="731520" y="1865376"/>
+            <a:ext cx="384048" cy="384048"/>
+          </a:xfrm>
+          <a:prstGeom prst="rect">
+            <a:avLst/>
+          </a:prstGeom>
+          <a:noFill/>
+          <a:ln/>
+        </p:spPr>
+        <p:txBody>
+          <a:bodyPr wrap="square" lIns="0" tIns="0" rIns="0" bIns="0" rtlCol="0" anchor="ctr">
+            <a:normAutofit/>
+          </a:bodyPr>
           <a:lstStyle/>
           <a:p>
             <a:pPr algn="ctr" indent="0" marL="0">
+              <a:lnSpc>
+                <a:spcPts val="1400"/>
+              </a:lnSpc>
               <a:buNone/>
             </a:pPr>
             <a:r>
@@ -4932,24 +4907,29 @@
         </p:nvSpPr>
         <p:spPr>
           <a:xfrm>
-            <a:off x="1280160" y="1792224"/>
-            <a:ext cx="7223760" cy="402336"/>
-          </a:xfrm>
-          <a:prstGeom prst="rect">
-            <a:avLst/>
-          </a:prstGeom>
-          <a:noFill/>
-          <a:ln/>
-        </p:spPr>
-        <p:txBody>
-          <a:bodyPr wrap="square" lIns="0" tIns="0" rIns="0" bIns="0" rtlCol="0" anchor="ctr"/>
+            <a:off x="1298448" y="1837944"/>
+            <a:ext cx="7223760" cy="438912"/>
+          </a:xfrm>
+          <a:prstGeom prst="rect">
+            <a:avLst/>
+          </a:prstGeom>
+          <a:noFill/>
+          <a:ln/>
+        </p:spPr>
+        <p:txBody>
+          <a:bodyPr wrap="square" lIns="0" tIns="0" rIns="0" bIns="0" rtlCol="0" anchor="ctr">
+            <a:normAutofit/>
+          </a:bodyPr>
           <a:lstStyle/>
           <a:p>
             <a:pPr indent="0" marL="0">
-              <a:buNone/>
-            </a:pPr>
-            <a:r>
-              <a:rPr lang="en-US" sz="1550" dirty="0">
+              <a:lnSpc>
+                <a:spcPts val="2200"/>
+              </a:lnSpc>
+              <a:buNone/>
+            </a:pPr>
+            <a:r>
+              <a:rPr lang="en-US" sz="1500" dirty="0">
                 <a:solidFill>
                   <a:srgbClr val="FFFFFF"/>
                 </a:solidFill>
@@ -4959,7 +4939,7 @@
               </a:rPr>
               <a:t>痛み止めは、我慢せずに使ってください</a:t>
             </a:r>
-            <a:endParaRPr lang="en-US" sz="1550" dirty="0"/>
+            <a:endParaRPr lang="en-US" sz="1500" dirty="0"/>
           </a:p>
         </p:txBody>
       </p:sp>
@@ -4971,8 +4951,8 @@
         </p:nvSpPr>
         <p:spPr>
           <a:xfrm>
-            <a:off x="731520" y="2359152"/>
-            <a:ext cx="365760" cy="365760"/>
+            <a:off x="731520" y="2432304"/>
+            <a:ext cx="384048" cy="384048"/>
           </a:xfrm>
           <a:prstGeom prst="ellipse">
             <a:avLst/>
@@ -4991,20 +4971,25 @@
         </p:nvSpPr>
         <p:spPr>
           <a:xfrm>
-            <a:off x="731520" y="2359152"/>
-            <a:ext cx="365760" cy="365760"/>
-          </a:xfrm>
-          <a:prstGeom prst="rect">
-            <a:avLst/>
-          </a:prstGeom>
-          <a:noFill/>
-          <a:ln/>
-        </p:spPr>
-        <p:txBody>
-          <a:bodyPr wrap="square" lIns="0" tIns="0" rIns="0" bIns="0" rtlCol="0" anchor="ctr"/>
+            <a:off x="731520" y="2432304"/>
+            <a:ext cx="384048" cy="384048"/>
+          </a:xfrm>
+          <a:prstGeom prst="rect">
+            <a:avLst/>
+          </a:prstGeom>
+          <a:noFill/>
+          <a:ln/>
+        </p:spPr>
+        <p:txBody>
+          <a:bodyPr wrap="square" lIns="0" tIns="0" rIns="0" bIns="0" rtlCol="0" anchor="ctr">
+            <a:normAutofit/>
+          </a:bodyPr>
           <a:lstStyle/>
           <a:p>
             <a:pPr algn="ctr" indent="0" marL="0">
+              <a:lnSpc>
+                <a:spcPts val="1400"/>
+              </a:lnSpc>
               <a:buNone/>
             </a:pPr>
             <a:r>
@@ -5030,24 +5015,29 @@
         </p:nvSpPr>
         <p:spPr>
           <a:xfrm>
-            <a:off x="1280160" y="2340864"/>
-            <a:ext cx="7223760" cy="402336"/>
-          </a:xfrm>
-          <a:prstGeom prst="rect">
-            <a:avLst/>
-          </a:prstGeom>
-          <a:noFill/>
-          <a:ln/>
-        </p:spPr>
-        <p:txBody>
-          <a:bodyPr wrap="square" lIns="0" tIns="0" rIns="0" bIns="0" rtlCol="0" anchor="ctr"/>
+            <a:off x="1298448" y="2404872"/>
+            <a:ext cx="7223760" cy="438912"/>
+          </a:xfrm>
+          <a:prstGeom prst="rect">
+            <a:avLst/>
+          </a:prstGeom>
+          <a:noFill/>
+          <a:ln/>
+        </p:spPr>
+        <p:txBody>
+          <a:bodyPr wrap="square" lIns="0" tIns="0" rIns="0" bIns="0" rtlCol="0" anchor="ctr">
+            <a:normAutofit/>
+          </a:bodyPr>
           <a:lstStyle/>
           <a:p>
             <a:pPr indent="0" marL="0">
-              <a:buNone/>
-            </a:pPr>
-            <a:r>
-              <a:rPr lang="en-US" sz="1550" dirty="0">
+              <a:lnSpc>
+                <a:spcPts val="2200"/>
+              </a:lnSpc>
+              <a:buNone/>
+            </a:pPr>
+            <a:r>
+              <a:rPr lang="en-US" sz="1500" dirty="0">
                 <a:solidFill>
                   <a:srgbClr val="FFFFFF"/>
                 </a:solidFill>
@@ -5057,7 +5047,7 @@
               </a:rPr>
               <a:t>痛くなりそうなとき・動く前に使うこともできます</a:t>
             </a:r>
-            <a:endParaRPr lang="en-US" sz="1550" dirty="0"/>
+            <a:endParaRPr lang="en-US" sz="1500" dirty="0"/>
           </a:p>
         </p:txBody>
       </p:sp>
@@ -5069,8 +5059,8 @@
         </p:nvSpPr>
         <p:spPr>
           <a:xfrm>
-            <a:off x="731520" y="2907792"/>
-            <a:ext cx="365760" cy="365760"/>
+            <a:off x="731520" y="2999232"/>
+            <a:ext cx="384048" cy="384048"/>
           </a:xfrm>
           <a:prstGeom prst="ellipse">
             <a:avLst/>
@@ -5089,20 +5079,25 @@
         </p:nvSpPr>
         <p:spPr>
           <a:xfrm>
-            <a:off x="731520" y="2907792"/>
-            <a:ext cx="365760" cy="365760"/>
-          </a:xfrm>
-          <a:prstGeom prst="rect">
-            <a:avLst/>
-          </a:prstGeom>
-          <a:noFill/>
-          <a:ln/>
-        </p:spPr>
-        <p:txBody>
-          <a:bodyPr wrap="square" lIns="0" tIns="0" rIns="0" bIns="0" rtlCol="0" anchor="ctr"/>
+            <a:off x="731520" y="2999232"/>
+            <a:ext cx="384048" cy="384048"/>
+          </a:xfrm>
+          <a:prstGeom prst="rect">
+            <a:avLst/>
+          </a:prstGeom>
+          <a:noFill/>
+          <a:ln/>
+        </p:spPr>
+        <p:txBody>
+          <a:bodyPr wrap="square" lIns="0" tIns="0" rIns="0" bIns="0" rtlCol="0" anchor="ctr">
+            <a:normAutofit/>
+          </a:bodyPr>
           <a:lstStyle/>
           <a:p>
             <a:pPr algn="ctr" indent="0" marL="0">
+              <a:lnSpc>
+                <a:spcPts val="1400"/>
+              </a:lnSpc>
               <a:buNone/>
             </a:pPr>
             <a:r>
@@ -5128,24 +5123,29 @@
         </p:nvSpPr>
         <p:spPr>
           <a:xfrm>
-            <a:off x="1280160" y="2889504"/>
-            <a:ext cx="7223760" cy="402336"/>
-          </a:xfrm>
-          <a:prstGeom prst="rect">
-            <a:avLst/>
-          </a:prstGeom>
-          <a:noFill/>
-          <a:ln/>
-        </p:spPr>
-        <p:txBody>
-          <a:bodyPr wrap="square" lIns="0" tIns="0" rIns="0" bIns="0" rtlCol="0" anchor="ctr"/>
+            <a:off x="1298448" y="2971800"/>
+            <a:ext cx="7223760" cy="438912"/>
+          </a:xfrm>
+          <a:prstGeom prst="rect">
+            <a:avLst/>
+          </a:prstGeom>
+          <a:noFill/>
+          <a:ln/>
+        </p:spPr>
+        <p:txBody>
+          <a:bodyPr wrap="square" lIns="0" tIns="0" rIns="0" bIns="0" rtlCol="0" anchor="ctr">
+            <a:normAutofit/>
+          </a:bodyPr>
           <a:lstStyle/>
           <a:p>
             <a:pPr indent="0" marL="0">
-              <a:buNone/>
-            </a:pPr>
-            <a:r>
-              <a:rPr lang="en-US" sz="1550" dirty="0">
+              <a:lnSpc>
+                <a:spcPts val="2200"/>
+              </a:lnSpc>
+              <a:buNone/>
+            </a:pPr>
+            <a:r>
+              <a:rPr lang="en-US" sz="1500" dirty="0">
                 <a:solidFill>
                   <a:srgbClr val="FFFFFF"/>
                 </a:solidFill>
@@ -5155,7 +5155,7 @@
               </a:rPr>
               <a:t>早く動けることがいちばん大事です。痛みを抑えるのはそのためです</a:t>
             </a:r>
-            <a:endParaRPr lang="en-US" sz="1550" dirty="0"/>
+            <a:endParaRPr lang="en-US" sz="1500" dirty="0"/>
           </a:p>
         </p:txBody>
       </p:sp>
@@ -5167,12 +5167,12 @@
         </p:nvSpPr>
         <p:spPr>
           <a:xfrm>
-            <a:off x="731520" y="3584448"/>
-            <a:ext cx="7680960" cy="713232"/>
+            <a:off x="731520" y="3657600"/>
+            <a:ext cx="7680960" cy="786384"/>
           </a:xfrm>
           <a:prstGeom prst="roundRect">
             <a:avLst>
-              <a:gd name="adj" fmla="val 12821"/>
+              <a:gd name="adj" fmla="val 11628"/>
             </a:avLst>
           </a:prstGeom>
           <a:solidFill>
@@ -5189,27 +5189,29 @@
         </p:nvSpPr>
         <p:spPr>
           <a:xfrm>
-            <a:off x="1005840" y="3675888"/>
-            <a:ext cx="7132320" cy="548640"/>
-          </a:xfrm>
-          <a:prstGeom prst="rect">
-            <a:avLst/>
-          </a:prstGeom>
-          <a:noFill/>
-          <a:ln/>
-        </p:spPr>
-        <p:txBody>
-          <a:bodyPr wrap="square" lIns="0" tIns="0" rIns="0" bIns="0" rtlCol="0" anchor="ctr"/>
+            <a:off x="1005840" y="3739896"/>
+            <a:ext cx="7132320" cy="621792"/>
+          </a:xfrm>
+          <a:prstGeom prst="rect">
+            <a:avLst/>
+          </a:prstGeom>
+          <a:noFill/>
+          <a:ln/>
+        </p:spPr>
+        <p:txBody>
+          <a:bodyPr wrap="square" lIns="0" tIns="0" rIns="0" bIns="0" rtlCol="0" anchor="ctr">
+            <a:normAutofit/>
+          </a:bodyPr>
           <a:lstStyle/>
           <a:p>
             <a:pPr indent="0" marL="0">
               <a:lnSpc>
-                <a:spcPct val="115000"/>
-              </a:lnSpc>
-              <a:buNone/>
-            </a:pPr>
-            <a:r>
-              <a:rPr lang="en-US" sz="1150" dirty="0">
+                <a:spcPts val="1700"/>
+              </a:lnSpc>
+              <a:buNone/>
+            </a:pPr>
+            <a:r>
+              <a:rPr lang="en-US" sz="1100" dirty="0">
                 <a:solidFill>
                   <a:srgbClr val="C9E2DE"/>
                 </a:solidFill>
@@ -5217,58 +5219,43 @@
                 <a:ea typeface="Meiryo" pitchFamily="34" charset="-122"/>
                 <a:cs typeface="Meiryo" pitchFamily="34" charset="-120"/>
               </a:rPr>
-              <a:t>痛み止めの種類・使える回数・間隔は、手術の内容や体の状態によって決まります。</a:t>
-            </a:r>
-            <a:endParaRPr lang="en-US" sz="1150" dirty="0"/>
-          </a:p>
+              <a:t>痛み止めの種類・使える回数・間隔は、手術の内容や体の状態によって決まります。実際に使うときは、担当の看護師・医師の指示を確認してください。</a:t>
+            </a:r>
+            <a:endParaRPr lang="en-US" sz="1100" dirty="0"/>
+          </a:p>
+        </p:txBody>
+      </p:sp>
+      <p:sp>
+        <p:nvSpPr>
+          <p:cNvPr id="17" name="Text 15"/>
+          <p:cNvSpPr txBox="1"/>
+          <p:nvPr/>
+        </p:nvSpPr>
+        <p:spPr>
+          <a:xfrm>
+            <a:off x="731520" y="4535424"/>
+            <a:ext cx="7680960" cy="292608"/>
+          </a:xfrm>
+          <a:prstGeom prst="rect">
+            <a:avLst/>
+          </a:prstGeom>
+          <a:noFill/>
+          <a:ln/>
+        </p:spPr>
+        <p:txBody>
+          <a:bodyPr wrap="square" lIns="0" tIns="0" rIns="0" bIns="0" rtlCol="0" anchor="ctr">
+            <a:normAutofit/>
+          </a:bodyPr>
+          <a:lstStyle/>
           <a:p>
             <a:pPr indent="0" marL="0">
               <a:lnSpc>
-                <a:spcPct val="115000"/>
-              </a:lnSpc>
-              <a:buNone/>
-            </a:pPr>
-            <a:r>
-              <a:rPr lang="en-US" sz="1150" dirty="0">
-                <a:solidFill>
-                  <a:srgbClr val="C9E2DE"/>
-                </a:solidFill>
-                <a:latin typeface="Meiryo" pitchFamily="34" charset="0"/>
-                <a:ea typeface="Meiryo" pitchFamily="34" charset="-122"/>
-                <a:cs typeface="Meiryo" pitchFamily="34" charset="-120"/>
-              </a:rPr>
-              <a:t>実際に使うときは、担当の看護師・医師の指示を確認してください。</a:t>
-            </a:r>
-            <a:endParaRPr lang="en-US" sz="1150" dirty="0"/>
-          </a:p>
-        </p:txBody>
-      </p:sp>
-      <p:sp>
-        <p:nvSpPr>
-          <p:cNvPr id="17" name="Text 15"/>
-          <p:cNvSpPr txBox="1"/>
-          <p:nvPr/>
-        </p:nvSpPr>
-        <p:spPr>
-          <a:xfrm>
-            <a:off x="731520" y="4462272"/>
-            <a:ext cx="7680960" cy="274320"/>
-          </a:xfrm>
-          <a:prstGeom prst="rect">
-            <a:avLst/>
-          </a:prstGeom>
-          <a:noFill/>
-          <a:ln/>
-        </p:spPr>
-        <p:txBody>
-          <a:bodyPr wrap="square" lIns="0" tIns="0" rIns="0" bIns="0" rtlCol="0" anchor="ctr"/>
-          <a:lstStyle/>
-          <a:p>
-            <a:pPr indent="0" marL="0">
-              <a:buNone/>
-            </a:pPr>
-            <a:r>
-              <a:rPr lang="en-US" sz="1000" dirty="0">
+                <a:spcPts val="1400"/>
+              </a:lnSpc>
+              <a:buNone/>
+            </a:pPr>
+            <a:r>
+              <a:rPr lang="en-US" sz="950" dirty="0">
                 <a:solidFill>
                   <a:srgbClr val="7FAAA5"/>
                 </a:solidFill>
@@ -5278,7 +5265,7 @@
               </a:rPr>
               <a:t>自主制作サンプル（架空の病院向け）｜作成：ヨアケ｜https://yoake-writer.github.io/portfolio/</a:t>
             </a:r>
-            <a:endParaRPr lang="en-US" sz="1000" dirty="0"/>
+            <a:endParaRPr lang="en-US" sz="950" dirty="0"/>
           </a:p>
         </p:txBody>
       </p:sp>

--- a/works/shiryo/術後の痛みの説明資料_サンプル_ヨアケ.pptx
+++ b/works/shiryo/術後の痛みの説明資料_サンプル_ヨアケ.pptx
@@ -1746,7 +1746,27 @@
                 <a:ea typeface="Meiryo" pitchFamily="34" charset="-122"/>
                 <a:cs typeface="Meiryo" pitchFamily="34" charset="-120"/>
               </a:rPr>
-              <a:t>「手術後はどのくらい痛いですか？」</a:t>
+              <a:t>「手術後はどのくらい</a:t>
+            </a:r>
+            <a:endParaRPr lang="en-US" sz="2000" dirty="0"/>
+          </a:p>
+          <a:p>
+            <a:pPr indent="0" marL="0">
+              <a:lnSpc>
+                <a:spcPts val="3200"/>
+              </a:lnSpc>
+              <a:buNone/>
+            </a:pPr>
+            <a:r>
+              <a:rPr lang="en-US" sz="2000" b="1" dirty="0">
+                <a:solidFill>
+                  <a:srgbClr val="0F766E"/>
+                </a:solidFill>
+                <a:latin typeface="Meiryo" pitchFamily="34" charset="0"/>
+                <a:ea typeface="Meiryo" pitchFamily="34" charset="-122"/>
+                <a:cs typeface="Meiryo" pitchFamily="34" charset="-120"/>
+              </a:rPr>
+              <a:t>痛いですか？」</a:t>
             </a:r>
             <a:endParaRPr lang="en-US" sz="2000" dirty="0"/>
           </a:p>
@@ -1834,7 +1854,27 @@
                 <a:ea typeface="Meiryo" pitchFamily="34" charset="-122"/>
                 <a:cs typeface="Meiryo" pitchFamily="34" charset="-120"/>
               </a:rPr>
-              <a:t>正直に言うと、どのくらい痛いかはお伝えできません。</a:t>
+              <a:t>正直に言うと、どのくらい</a:t>
+            </a:r>
+            <a:endParaRPr lang="en-US" sz="1500" dirty="0"/>
+          </a:p>
+          <a:p>
+            <a:pPr indent="0" marL="0">
+              <a:lnSpc>
+                <a:spcPts val="2200"/>
+              </a:lnSpc>
+              <a:buNone/>
+            </a:pPr>
+            <a:r>
+              <a:rPr lang="en-US" sz="1500" b="1" dirty="0">
+                <a:solidFill>
+                  <a:srgbClr val="1C2422"/>
+                </a:solidFill>
+                <a:latin typeface="Meiryo" pitchFamily="34" charset="0"/>
+                <a:ea typeface="Meiryo" pitchFamily="34" charset="-122"/>
+                <a:cs typeface="Meiryo" pitchFamily="34" charset="-120"/>
+              </a:rPr>
+              <a:t>痛いかはお伝えできません。</a:t>
             </a:r>
             <a:endParaRPr lang="en-US" sz="1500" dirty="0"/>
           </a:p>
@@ -1878,7 +1918,27 @@
                 <a:ea typeface="Meiryo" pitchFamily="34" charset="-122"/>
                 <a:cs typeface="Meiryo" pitchFamily="34" charset="-120"/>
               </a:rPr>
-              <a:t>痛みの感じ方は人によって違うためです。同じ手術でも、感じ方は変わります。</a:t>
+              <a:t>痛みの感じ方は人によって違うためです。</a:t>
+            </a:r>
+            <a:endParaRPr lang="en-US" sz="1200" dirty="0"/>
+          </a:p>
+          <a:p>
+            <a:pPr indent="0" marL="0">
+              <a:lnSpc>
+                <a:spcPts val="1700"/>
+              </a:lnSpc>
+              <a:buNone/>
+            </a:pPr>
+            <a:r>
+              <a:rPr lang="en-US" sz="1200" dirty="0">
+                <a:solidFill>
+                  <a:srgbClr val="5D6B66"/>
+                </a:solidFill>
+                <a:latin typeface="Meiryo" pitchFamily="34" charset="0"/>
+                <a:ea typeface="Meiryo" pitchFamily="34" charset="-122"/>
+                <a:cs typeface="Meiryo" pitchFamily="34" charset="-120"/>
+              </a:rPr>
+              <a:t>同じ手術でも、感じ方は変わります。</a:t>
             </a:r>
             <a:endParaRPr lang="en-US" sz="1200" dirty="0"/>
           </a:p>
@@ -1922,7 +1982,27 @@
                 <a:ea typeface="Meiryo" pitchFamily="34" charset="-122"/>
                 <a:cs typeface="Meiryo" pitchFamily="34" charset="-120"/>
               </a:rPr>
-              <a:t>だから、この資料では「どのくらい痛いか」ではなく、痛みを抑えて早く動くために何ができるかをお伝えします。</a:t>
+              <a:t>だから、この資料では「どのくらい痛いか」ではなく、</a:t>
+            </a:r>
+            <a:endParaRPr lang="en-US" sz="1400" dirty="0"/>
+          </a:p>
+          <a:p>
+            <a:pPr indent="0" marL="0">
+              <a:lnSpc>
+                <a:spcPts val="2000"/>
+              </a:lnSpc>
+              <a:buNone/>
+            </a:pPr>
+            <a:r>
+              <a:rPr lang="en-US" sz="1400" dirty="0">
+                <a:solidFill>
+                  <a:srgbClr val="1C2422"/>
+                </a:solidFill>
+                <a:latin typeface="Meiryo" pitchFamily="34" charset="0"/>
+                <a:ea typeface="Meiryo" pitchFamily="34" charset="-122"/>
+                <a:cs typeface="Meiryo" pitchFamily="34" charset="-120"/>
+              </a:rPr>
+              <a:t>痛みを抑えて早く動くために何ができるかをお伝えします。</a:t>
             </a:r>
             <a:endParaRPr lang="en-US" sz="1400" dirty="0"/>
           </a:p>
@@ -2221,7 +2301,27 @@
                 <a:ea typeface="Meiryo" pitchFamily="34" charset="-122"/>
                 <a:cs typeface="Meiryo" pitchFamily="34" charset="-120"/>
               </a:rPr>
-              <a:t>我慢しないで使ってください</a:t>
+              <a:t>我慢しないで</a:t>
+            </a:r>
+            <a:endParaRPr lang="en-US" sz="1450" dirty="0"/>
+          </a:p>
+          <a:p>
+            <a:pPr indent="0" marL="0">
+              <a:lnSpc>
+                <a:spcPts val="2200"/>
+              </a:lnSpc>
+              <a:buNone/>
+            </a:pPr>
+            <a:r>
+              <a:rPr lang="en-US" sz="1450" b="1" dirty="0">
+                <a:solidFill>
+                  <a:srgbClr val="0F766E"/>
+                </a:solidFill>
+                <a:latin typeface="Meiryo" pitchFamily="34" charset="0"/>
+                <a:ea typeface="Meiryo" pitchFamily="34" charset="-122"/>
+                <a:cs typeface="Meiryo" pitchFamily="34" charset="-120"/>
+              </a:rPr>
+              <a:t>使ってください</a:t>
             </a:r>
             <a:endParaRPr lang="en-US" sz="1450" dirty="0"/>
           </a:p>
@@ -2265,7 +2365,27 @@
                 <a:ea typeface="Meiryo" pitchFamily="34" charset="-122"/>
                 <a:cs typeface="Meiryo" pitchFamily="34" charset="-120"/>
               </a:rPr>
-              <a:t>我慢しても、手術の回復が早くなるわけではありません。</a:t>
+              <a:t>我慢しても、回復は</a:t>
+            </a:r>
+            <a:endParaRPr lang="en-US" sz="1100" dirty="0"/>
+          </a:p>
+          <a:p>
+            <a:pPr indent="0" marL="0">
+              <a:lnSpc>
+                <a:spcPts val="1700"/>
+              </a:lnSpc>
+              <a:buNone/>
+            </a:pPr>
+            <a:r>
+              <a:rPr lang="en-US" sz="1100" dirty="0">
+                <a:solidFill>
+                  <a:srgbClr val="5D6B66"/>
+                </a:solidFill>
+                <a:latin typeface="Meiryo" pitchFamily="34" charset="0"/>
+                <a:ea typeface="Meiryo" pitchFamily="34" charset="-122"/>
+                <a:cs typeface="Meiryo" pitchFamily="34" charset="-120"/>
+              </a:rPr>
+              <a:t>早くなりません。</a:t>
             </a:r>
             <a:endParaRPr lang="en-US" sz="1100" dirty="0"/>
           </a:p>
@@ -2407,7 +2527,27 @@
                 <a:ea typeface="Meiryo" pitchFamily="34" charset="-122"/>
                 <a:cs typeface="Meiryo" pitchFamily="34" charset="-120"/>
               </a:rPr>
-              <a:t>痛くなりそうなときに使えます</a:t>
+              <a:t>痛くなりそうなときに</a:t>
+            </a:r>
+            <a:endParaRPr lang="en-US" sz="1450" dirty="0"/>
+          </a:p>
+          <a:p>
+            <a:pPr indent="0" marL="0">
+              <a:lnSpc>
+                <a:spcPts val="2200"/>
+              </a:lnSpc>
+              <a:buNone/>
+            </a:pPr>
+            <a:r>
+              <a:rPr lang="en-US" sz="1450" b="1" dirty="0">
+                <a:solidFill>
+                  <a:srgbClr val="0F766E"/>
+                </a:solidFill>
+                <a:latin typeface="Meiryo" pitchFamily="34" charset="0"/>
+                <a:ea typeface="Meiryo" pitchFamily="34" charset="-122"/>
+                <a:cs typeface="Meiryo" pitchFamily="34" charset="-120"/>
+              </a:rPr>
+              <a:t>使えます</a:t>
             </a:r>
             <a:endParaRPr lang="en-US" sz="1450" dirty="0"/>
           </a:p>
@@ -2451,7 +2591,27 @@
                 <a:ea typeface="Meiryo" pitchFamily="34" charset="-122"/>
                 <a:cs typeface="Meiryo" pitchFamily="34" charset="-120"/>
               </a:rPr>
-              <a:t>痛みが強くなりきってからでなくてかまいません。</a:t>
+              <a:t>痛みが強くなるのを</a:t>
+            </a:r>
+            <a:endParaRPr lang="en-US" sz="1100" dirty="0"/>
+          </a:p>
+          <a:p>
+            <a:pPr indent="0" marL="0">
+              <a:lnSpc>
+                <a:spcPts val="1700"/>
+              </a:lnSpc>
+              <a:buNone/>
+            </a:pPr>
+            <a:r>
+              <a:rPr lang="en-US" sz="1100" dirty="0">
+                <a:solidFill>
+                  <a:srgbClr val="5D6B66"/>
+                </a:solidFill>
+                <a:latin typeface="Meiryo" pitchFamily="34" charset="0"/>
+                <a:ea typeface="Meiryo" pitchFamily="34" charset="-122"/>
+                <a:cs typeface="Meiryo" pitchFamily="34" charset="-120"/>
+              </a:rPr>
+              <a:t>待たなくて大丈夫です。</a:t>
             </a:r>
             <a:endParaRPr lang="en-US" sz="1100" dirty="0"/>
           </a:p>
@@ -2637,7 +2797,27 @@
                 <a:ea typeface="Meiryo" pitchFamily="34" charset="-122"/>
                 <a:cs typeface="Meiryo" pitchFamily="34" charset="-120"/>
               </a:rPr>
-              <a:t>起き上がる前・歩く前など、動く予定に合わせて使えます。</a:t>
+              <a:t>起き上がる前や</a:t>
+            </a:r>
+            <a:endParaRPr lang="en-US" sz="1100" dirty="0"/>
+          </a:p>
+          <a:p>
+            <a:pPr indent="0" marL="0">
+              <a:lnSpc>
+                <a:spcPts val="1700"/>
+              </a:lnSpc>
+              <a:buNone/>
+            </a:pPr>
+            <a:r>
+              <a:rPr lang="en-US" sz="1100" dirty="0">
+                <a:solidFill>
+                  <a:srgbClr val="5D6B66"/>
+                </a:solidFill>
+                <a:latin typeface="Meiryo" pitchFamily="34" charset="0"/>
+                <a:ea typeface="Meiryo" pitchFamily="34" charset="-122"/>
+                <a:cs typeface="Meiryo" pitchFamily="34" charset="-120"/>
+              </a:rPr>
+              <a:t>歩く前に、先に使えます。</a:t>
             </a:r>
             <a:endParaRPr lang="en-US" sz="1100" dirty="0"/>
           </a:p>
@@ -3568,8 +3748,8 @@
         </p:nvSpPr>
         <p:spPr>
           <a:xfrm>
-            <a:off x="548640" y="4352544"/>
-            <a:ext cx="8046720" cy="329184"/>
+            <a:off x="548640" y="4315968"/>
+            <a:ext cx="8046720" cy="274320"/>
           </a:xfrm>
           <a:prstGeom prst="rect">
             <a:avLst/>
@@ -3601,6 +3781,50 @@
               <a:t>どちらが良いかは、担当の看護師・医師と相談して決めてかまいません。</a:t>
             </a:r>
             <a:endParaRPr lang="en-US" sz="1150" dirty="0"/>
+          </a:p>
+        </p:txBody>
+      </p:sp>
+      <p:sp>
+        <p:nvSpPr>
+          <p:cNvPr id="26" name="Text 24"/>
+          <p:cNvSpPr txBox="1"/>
+          <p:nvPr/>
+        </p:nvSpPr>
+        <p:spPr>
+          <a:xfrm>
+            <a:off x="548640" y="4663440"/>
+            <a:ext cx="6583680" cy="292608"/>
+          </a:xfrm>
+          <a:prstGeom prst="rect">
+            <a:avLst/>
+          </a:prstGeom>
+          <a:noFill/>
+          <a:ln/>
+        </p:spPr>
+        <p:txBody>
+          <a:bodyPr wrap="square" lIns="0" tIns="0" rIns="0" bIns="0" rtlCol="0" anchor="ctr">
+            <a:normAutofit/>
+          </a:bodyPr>
+          <a:lstStyle/>
+          <a:p>
+            <a:pPr indent="0" marL="0">
+              <a:lnSpc>
+                <a:spcPts val="1400"/>
+              </a:lnSpc>
+              <a:buNone/>
+            </a:pPr>
+            <a:r>
+              <a:rPr lang="en-US" sz="950" dirty="0">
+                <a:solidFill>
+                  <a:srgbClr val="5D6B66"/>
+                </a:solidFill>
+                <a:latin typeface="Meiryo" pitchFamily="34" charset="0"/>
+                <a:ea typeface="Meiryo" pitchFamily="34" charset="-122"/>
+                <a:cs typeface="Meiryo" pitchFamily="34" charset="-120"/>
+              </a:rPr>
+              <a:t>自主制作サンプル｜ヨアケ（看護師12年・手術室勤務あり）</a:t>
+            </a:r>
+            <a:endParaRPr lang="en-US" sz="950" dirty="0"/>
           </a:p>
         </p:txBody>
       </p:sp>
@@ -3738,7 +3962,27 @@
                 <a:ea typeface="Meiryo" pitchFamily="34" charset="-122"/>
                 <a:cs typeface="Meiryo" pitchFamily="34" charset="-120"/>
               </a:rPr>
-              <a:t>手術のあとは、早めに起きて動くことが何より大事です（早期離床といいます）。動くことで体の回復が進みます。痛み止めは、そのために使う道具でもあります。</a:t>
+              <a:t>手術のあとは、早めに起きて動くことが何より大事です（早期離床といいます）。</a:t>
+            </a:r>
+            <a:endParaRPr lang="en-US" sz="1300" dirty="0"/>
+          </a:p>
+          <a:p>
+            <a:pPr indent="0" marL="0">
+              <a:lnSpc>
+                <a:spcPts val="1900"/>
+              </a:lnSpc>
+              <a:buNone/>
+            </a:pPr>
+            <a:r>
+              <a:rPr lang="en-US" sz="1300" b="1" dirty="0">
+                <a:solidFill>
+                  <a:srgbClr val="0F766E"/>
+                </a:solidFill>
+                <a:latin typeface="Meiryo" pitchFamily="34" charset="0"/>
+                <a:ea typeface="Meiryo" pitchFamily="34" charset="-122"/>
+                <a:cs typeface="Meiryo" pitchFamily="34" charset="-120"/>
+              </a:rPr>
+              <a:t>動くことで体の回復が進みます。痛み止めは、そのために使う道具でもあります。</a:t>
             </a:r>
             <a:endParaRPr lang="en-US" sz="1300" dirty="0"/>
           </a:p>
@@ -4645,9 +4889,73 @@
                 <a:ea typeface="Meiryo" pitchFamily="34" charset="-122"/>
                 <a:cs typeface="Meiryo" pitchFamily="34" charset="-120"/>
               </a:rPr>
-              <a:t>痛み止めを使いたいと言うことは、我慢が足りないということではありません。痛みが強いままだと、動くこと・休むことがどちらもしにくくなります。</a:t>
+              <a:t>痛み止めを使いたいと言うことは、我慢が足りないということではありません。</a:t>
             </a:r>
             <a:endParaRPr lang="en-US" sz="1300" dirty="0"/>
+          </a:p>
+          <a:p>
+            <a:pPr indent="0" marL="0">
+              <a:lnSpc>
+                <a:spcPts val="2000"/>
+              </a:lnSpc>
+              <a:buNone/>
+            </a:pPr>
+            <a:r>
+              <a:rPr lang="en-US" sz="1300" dirty="0">
+                <a:solidFill>
+                  <a:srgbClr val="1C2422"/>
+                </a:solidFill>
+                <a:latin typeface="Meiryo" pitchFamily="34" charset="0"/>
+                <a:ea typeface="Meiryo" pitchFamily="34" charset="-122"/>
+                <a:cs typeface="Meiryo" pitchFamily="34" charset="-120"/>
+              </a:rPr>
+              <a:t>痛みが強いままだと、動くこと・休むことがどちらもしにくくなります。</a:t>
+            </a:r>
+            <a:endParaRPr lang="en-US" sz="1300" dirty="0"/>
+          </a:p>
+        </p:txBody>
+      </p:sp>
+      <p:sp>
+        <p:nvSpPr>
+          <p:cNvPr id="9" name="Text 7"/>
+          <p:cNvSpPr txBox="1"/>
+          <p:nvPr/>
+        </p:nvSpPr>
+        <p:spPr>
+          <a:xfrm>
+            <a:off x="548640" y="4663440"/>
+            <a:ext cx="6583680" cy="292608"/>
+          </a:xfrm>
+          <a:prstGeom prst="rect">
+            <a:avLst/>
+          </a:prstGeom>
+          <a:noFill/>
+          <a:ln/>
+        </p:spPr>
+        <p:txBody>
+          <a:bodyPr wrap="square" lIns="0" tIns="0" rIns="0" bIns="0" rtlCol="0" anchor="ctr">
+            <a:normAutofit/>
+          </a:bodyPr>
+          <a:lstStyle/>
+          <a:p>
+            <a:pPr indent="0" marL="0">
+              <a:lnSpc>
+                <a:spcPts val="1400"/>
+              </a:lnSpc>
+              <a:buNone/>
+            </a:pPr>
+            <a:r>
+              <a:rPr lang="en-US" sz="950" dirty="0">
+                <a:solidFill>
+                  <a:srgbClr val="5D6B66"/>
+                </a:solidFill>
+                <a:latin typeface="Meiryo" pitchFamily="34" charset="0"/>
+                <a:ea typeface="Meiryo" pitchFamily="34" charset="-122"/>
+                <a:cs typeface="Meiryo" pitchFamily="34" charset="-120"/>
+              </a:rPr>
+              <a:t>自主制作サンプル｜ヨアケ（看護師12年・手術室勤務あり）</a:t>
+            </a:r>
+            <a:endParaRPr lang="en-US" sz="950" dirty="0"/>
           </a:p>
         </p:txBody>
       </p:sp>
@@ -5219,7 +5527,27 @@
                 <a:ea typeface="Meiryo" pitchFamily="34" charset="-122"/>
                 <a:cs typeface="Meiryo" pitchFamily="34" charset="-120"/>
               </a:rPr>
-              <a:t>痛み止めの種類・使える回数・間隔は、手術の内容や体の状態によって決まります。実際に使うときは、担当の看護師・医師の指示を確認してください。</a:t>
+              <a:t>痛み止めの種類・使える回数・間隔は、手術の内容や体の状態によって</a:t>
+            </a:r>
+            <a:endParaRPr lang="en-US" sz="1100" dirty="0"/>
+          </a:p>
+          <a:p>
+            <a:pPr indent="0" marL="0">
+              <a:lnSpc>
+                <a:spcPts val="1700"/>
+              </a:lnSpc>
+              <a:buNone/>
+            </a:pPr>
+            <a:r>
+              <a:rPr lang="en-US" sz="1100" dirty="0">
+                <a:solidFill>
+                  <a:srgbClr val="C9E2DE"/>
+                </a:solidFill>
+                <a:latin typeface="Meiryo" pitchFamily="34" charset="0"/>
+                <a:ea typeface="Meiryo" pitchFamily="34" charset="-122"/>
+                <a:cs typeface="Meiryo" pitchFamily="34" charset="-120"/>
+              </a:rPr>
+              <a:t>決まります。実際に使うときは、担当の看護師・医師の指示を確認してください。</a:t>
             </a:r>
             <a:endParaRPr lang="en-US" sz="1100" dirty="0"/>
           </a:p>
